--- a/docs/slides.pptx
+++ b/docs/slides.pptx
@@ -15,9 +15,10 @@
     <p:sldId id="263" r:id="rId9"/>
     <p:sldId id="264" r:id="rId10"/>
     <p:sldId id="265" r:id="rId11"/>
+    <p:sldId id="266" r:id="rId12"/>
   </p:sldIdLst>
   <p:notesMasterIdLst>
-    <p:notesMasterId r:id="rId12"/>
+    <p:notesMasterId r:id="rId13"/>
   </p:notesMasterIdLst>
   <p:sldSz cx="9144000" cy="5143500"/>
   <p:notesSz cx="5143500" cy="9144000"/>
@@ -116,30 +117,31 @@
   <p:extLst>
     <p:ext uri="{521415D9-36F7-43E2-AB2F-B90AF26B5E84}">
       <p14:sectionLst xmlns:p14="http://schemas.microsoft.com/office/powerpoint/2010/main">
-        <p14:section name="소개" id="{0b1437b9-88e5-2bd2-ca2b-1d972aa8a9d7}">
+        <p14:section name="소개" id="{fe65b62e-96c9-6465-6fc4-a39da427645a}">
           <p14:sldIdLst>
             <p14:sldId id="256"/>
           </p14:sldIdLst>
         </p14:section>
-        <p14:section name="시스템" id="{35c297c3-cac2-5cdf-df0e-313e1a2a2722}">
+        <p14:section name="시스템" id="{9e265fea-739f-a8b2-4254-edd59439d191}">
           <p14:sldIdLst>
             <p14:sldId id="257"/>
             <p14:sldId id="258"/>
             <p14:sldId id="259"/>
           </p14:sldIdLst>
         </p14:section>
-        <p14:section name="인식 · 판단 · 행동" id="{a134829e-2a07-4deb-b903-9d2b26289b3c}">
+        <p14:section name="인식 · 판단 · 행동" id="{6a33c409-0002-ff89-b9c4-03ab3641231c}">
           <p14:sldIdLst>
             <p14:sldId id="260"/>
             <p14:sldId id="261"/>
             <p14:sldId id="262"/>
             <p14:sldId id="263"/>
+            <p14:sldId id="264"/>
           </p14:sldIdLst>
         </p14:section>
-        <p14:section name="결과" id="{0a43b3af-9463-b319-4c91-65c284b9dd42}">
+        <p14:section name="결과" id="{638f7343-39c2-9240-78a0-b3e4f47631d6}">
           <p14:sldIdLst>
-            <p14:sldId id="264"/>
             <p14:sldId id="265"/>
+            <p14:sldId id="266"/>
           </p14:sldIdLst>
         </p14:section>
       </p14:sectionLst>
@@ -892,7 +894,7 @@
           <a:p>
             <a:r>
               <a:rPr lang="en-US" dirty="0"/>
-              <a:t>정리: 역할 분리, 데이터 기반 현장 값, OpenVINO 온디바이스. 다음은 제어 주기와 리허설.</a:t>
+              <a:t>GPU는 시작할 때 모델 컴파일에 2분이 걸려 CPU로 실행한다. 추론 1회로 3.3초 분량을 움직이니 충분하다.</a:t>
             </a:r>
             <a:endParaRPr lang="en-US" dirty="0"/>
           </a:p>
@@ -916,6 +918,94 @@
             <a:fld id="{F7021451-1387-4CA6-816F-3879F97B5CBC}" type="slidenum">
               <a:rPr lang="en-US"/>
               <a:t>10</a:t>
+            </a:fld>
+            <a:endParaRPr lang="en-US"/>
+          </a:p>
+        </p:txBody>
+      </p:sp>
+    </p:spTree>
+    <p:extLst>
+      <p:ext uri="{BB962C8B-B14F-4D97-AF65-F5344CB8AC3E}">
+        <p14:creationId xmlns:p14="http://schemas.microsoft.com/office/powerpoint/2010/main" val="1024086991"/>
+      </p:ext>
+    </p:extLst>
+  </p:cSld>
+  <p:clrMapOvr>
+    <a:masterClrMapping/>
+  </p:clrMapOvr>
+</p:notes>
+</file>
+
+<file path=ppt/notesSlides/notesSlide11.xml><?xml version="1.0" encoding="utf-8"?>
+<p:notes xmlns:a="http://schemas.openxmlformats.org/drawingml/2006/main" xmlns:r="http://schemas.openxmlformats.org/officeDocument/2006/relationships" xmlns:p="http://schemas.openxmlformats.org/presentationml/2006/main">
+  <p:cSld>
+    <p:spTree>
+      <p:nvGrpSpPr>
+        <p:cNvPr id="1" name=""/>
+        <p:cNvGrpSpPr/>
+        <p:nvPr/>
+      </p:nvGrpSpPr>
+      <p:grpSpPr>
+        <a:xfrm>
+          <a:off x="0" y="0"/>
+          <a:ext cx="0" cy="0"/>
+          <a:chOff x="0" y="0"/>
+          <a:chExt cx="0" cy="0"/>
+        </a:xfrm>
+      </p:grpSpPr>
+      <p:sp>
+        <p:nvSpPr>
+          <p:cNvPr id="2" name="Slide Image Placeholder 1"/>
+          <p:cNvSpPr>
+            <a:spLocks noGrp="1" noRot="1" noChangeAspect="1"/>
+          </p:cNvSpPr>
+          <p:nvPr>
+            <p:ph type="sldImg"/>
+          </p:nvPr>
+        </p:nvSpPr>
+        <p:spPr/>
+      </p:sp>
+      <p:sp>
+        <p:nvSpPr>
+          <p:cNvPr id="3" name="Notes Placeholder 2"/>
+          <p:cNvSpPr>
+            <a:spLocks noGrp="1"/>
+          </p:cNvSpPr>
+          <p:nvPr>
+            <p:ph type="body" idx="1"/>
+          </p:nvPr>
+        </p:nvSpPr>
+        <p:spPr/>
+        <p:txBody>
+          <a:bodyPr/>
+          <a:lstStyle/>
+          <a:p>
+            <a:r>
+              <a:rPr lang="en-US" dirty="0"/>
+              <a:t>정리: 역할 분리, 데이터 기반 현장 값, OpenVINO 온디바이스. 다음은 제어 주기와 리허설.</a:t>
+            </a:r>
+            <a:endParaRPr lang="en-US" dirty="0"/>
+          </a:p>
+        </p:txBody>
+      </p:sp>
+      <p:sp>
+        <p:nvSpPr>
+          <p:cNvPr id="4" name="Slide Number Placeholder 3"/>
+          <p:cNvSpPr>
+            <a:spLocks noGrp="1"/>
+          </p:cNvSpPr>
+          <p:nvPr>
+            <p:ph type="sldNum" sz="quarter" idx="10"/>
+          </p:nvPr>
+        </p:nvSpPr>
+        <p:spPr/>
+        <p:txBody>
+          <a:bodyPr/>
+          <a:lstStyle/>
+          <a:p>
+            <a:fld id="{F7021451-1387-4CA6-816F-3879F97B5CBC}" type="slidenum">
+              <a:rPr lang="en-US"/>
+              <a:t>11</a:t>
             </a:fld>
             <a:endParaRPr lang="en-US"/>
           </a:p>
@@ -1420,7 +1510,7 @@
           <a:p>
             <a:r>
               <a:rPr lang="en-US" dirty="0"/>
-              <a:t>녹화부터 실행까지 네 단계. 그리퍼 값으로 놓는 순간을 감지해 ACT를 멈추고 코드가 복귀시킨다.</a:t>
+              <a:t>녹화 규칙: 에피소드 하나 = 동작 한 번, 홈에서 시작, 놓자마자 종료(복귀는 코드), 과자 위치는 바꾸고 트레이는 고정. 오란다는 5 에포크라 아직 덜 학습됐고, 도리도리는 데이터가 적어 과적합이다.</a:t>
             </a:r>
             <a:endParaRPr lang="en-US" dirty="0"/>
           </a:p>
@@ -1508,7 +1598,7 @@
           <a:p>
             <a:r>
               <a:rPr lang="en-US" dirty="0"/>
-              <a:t>음성 인식은 노트북 안 OpenVINO Whisper. 상태별로 받아들이는 말이 정해져 있다.</a:t>
+              <a:t>녹화부터 실행까지 네 단계. 그리퍼 값으로 놓는 순간을 감지해 ACT를 멈추고 코드가 복귀시킨다.</a:t>
             </a:r>
             <a:endParaRPr lang="en-US" dirty="0"/>
           </a:p>
@@ -1596,7 +1686,7 @@
           <a:p>
             <a:r>
               <a:rPr lang="en-US" dirty="0"/>
-              <a:t>GPU는 시작할 때 모델 컴파일에 2분이 걸려 CPU로 실행한다. 추론 1회로 3.3초 분량을 움직이니 충분하다.</a:t>
+              <a:t>음성 인식은 노트북 안 OpenVINO Whisper. 상태별로 받아들이는 말이 정해져 있다.</a:t>
             </a:r>
             <a:endParaRPr lang="en-US" dirty="0"/>
           </a:p>
@@ -2798,6 +2888,632 @@
       <p:sp>
         <p:nvSpPr>
           <p:cNvPr id="2" name="Text 0"/>
+          <p:cNvSpPr/>
+          <p:nvPr>
+            <p:ph idx="100" type="title" hasCustomPrompt="1"/>
+          </p:nvPr>
+        </p:nvSpPr>
+        <p:spPr>
+          <a:xfrm>
+            <a:off x="457200" y="292608"/>
+            <a:ext cx="8229600" cy="548640"/>
+          </a:xfrm>
+          <a:prstGeom prst="rect">
+            <a:avLst/>
+          </a:prstGeom>
+          <a:noFill/>
+          <a:ln/>
+        </p:spPr>
+        <p:txBody>
+          <a:bodyPr wrap="square" lIns="0" tIns="0" rIns="0" bIns="0" rtlCol="0" anchor="ctr"/>
+          <a:lstStyle/>
+          <a:p>
+            <a:pPr indent="0" marL="0">
+              <a:buNone/>
+            </a:pPr>
+            <a:r>
+              <a:rPr lang="en-US" sz="3000" b="1" dirty="0">
+                <a:solidFill>
+                  <a:schemeClr val="tx1"/>
+                </a:solidFill>
+              </a:rPr>
+              <a:t>실기 결과 (2026-10-23)</a:t>
+            </a:r>
+            <a:endParaRPr lang="en-US" sz="3000" dirty="0"/>
+          </a:p>
+        </p:txBody>
+      </p:sp>
+      <p:sp>
+        <p:nvSpPr>
+          <p:cNvPr id="3" name="Text 0"/>
+          <p:cNvSpPr/>
+          <p:nvPr>
+            <p:ph idx="101" type="body" hasCustomPrompt="1"/>
+          </p:nvPr>
+        </p:nvSpPr>
+        <p:spPr>
+          <a:xfrm>
+            <a:off x="457200" y="822960"/>
+            <a:ext cx="8229600" cy="365760"/>
+          </a:xfrm>
+          <a:prstGeom prst="rect">
+            <a:avLst/>
+          </a:prstGeom>
+          <a:noFill/>
+          <a:ln/>
+        </p:spPr>
+        <p:txBody>
+          <a:bodyPr wrap="square" lIns="0" tIns="0" rIns="0" bIns="0" rtlCol="0" anchor="t"/>
+          <a:lstStyle/>
+          <a:p>
+            <a:pPr indent="0" marL="0">
+              <a:buNone/>
+            </a:pPr>
+            <a:r>
+              <a:rPr lang="en-US" sz="1400" dirty="0">
+                <a:solidFill>
+                  <a:schemeClr val="tx2"/>
+                </a:solidFill>
+              </a:rPr>
+              <a:t>노트북에 실제 팔 · 카메라를 연결해 확인한 숫자</a:t>
+            </a:r>
+            <a:endParaRPr lang="en-US" sz="1400" dirty="0"/>
+          </a:p>
+        </p:txBody>
+      </p:sp>
+      <p:sp>
+        <p:nvSpPr>
+          <p:cNvPr id="4" name="stat-187"/>
+          <p:cNvSpPr/>
+          <p:nvPr/>
+        </p:nvSpPr>
+        <p:spPr>
+          <a:xfrm>
+            <a:off x="457200" y="1280160"/>
+            <a:ext cx="1920240" cy="960120"/>
+          </a:xfrm>
+          <a:prstGeom prst="roundRect">
+            <a:avLst>
+              <a:gd name="adj" fmla="val 7619"/>
+            </a:avLst>
+          </a:prstGeom>
+          <a:solidFill>
+            <a:srgbClr val="F3F5F8"/>
+          </a:solidFill>
+          <a:ln w="12700">
+            <a:solidFill>
+              <a:srgbClr val="C9CFD8"/>
+            </a:solidFill>
+            <a:prstDash val="solid"/>
+          </a:ln>
+        </p:spPr>
+      </p:sp>
+      <p:sp>
+        <p:nvSpPr>
+          <p:cNvPr id="5" name="stattext-188"/>
+          <p:cNvSpPr txBox="1"/>
+          <p:nvPr/>
+        </p:nvSpPr>
+        <p:spPr>
+          <a:xfrm>
+            <a:off x="566928" y="1325880"/>
+            <a:ext cx="1737360" cy="868680"/>
+          </a:xfrm>
+          <a:prstGeom prst="rect">
+            <a:avLst/>
+          </a:prstGeom>
+          <a:noFill/>
+          <a:ln/>
+        </p:spPr>
+        <p:txBody>
+          <a:bodyPr wrap="square" lIns="0" tIns="0" rIns="0" bIns="0" rtlCol="0" anchor="ctr"/>
+          <a:lstStyle/>
+          <a:p>
+            <a:pPr indent="0" marL="0">
+              <a:buNone/>
+            </a:pPr>
+            <a:r>
+              <a:rPr lang="en-US" sz="2000" b="1" dirty="0">
+                <a:solidFill>
+                  <a:srgbClr val="1B7F4B"/>
+                </a:solidFill>
+              </a:rPr>
+              <a:t>성공</a:t>
+            </a:r>
+            <a:endParaRPr lang="en-US" sz="2000" dirty="0"/>
+          </a:p>
+          <a:p>
+            <a:pPr indent="0" marL="0">
+              <a:buNone/>
+            </a:pPr>
+            <a:r>
+              <a:rPr lang="en-US" sz="1100" dirty="0">
+                <a:solidFill>
+                  <a:srgbClr val="4A5366"/>
+                </a:solidFill>
+              </a:rPr>
+              <a:t>오란다 1회 · 놓기 감지 · 22.7초</a:t>
+            </a:r>
+            <a:endParaRPr lang="en-US" sz="2000" dirty="0"/>
+          </a:p>
+        </p:txBody>
+      </p:sp>
+      <p:sp>
+        <p:nvSpPr>
+          <p:cNvPr id="6" name="stat-189"/>
+          <p:cNvSpPr/>
+          <p:nvPr/>
+        </p:nvSpPr>
+        <p:spPr>
+          <a:xfrm>
+            <a:off x="2560320" y="1280160"/>
+            <a:ext cx="1920240" cy="960120"/>
+          </a:xfrm>
+          <a:prstGeom prst="roundRect">
+            <a:avLst>
+              <a:gd name="adj" fmla="val 7619"/>
+            </a:avLst>
+          </a:prstGeom>
+          <a:solidFill>
+            <a:srgbClr val="F3F5F8"/>
+          </a:solidFill>
+          <a:ln w="12700">
+            <a:solidFill>
+              <a:srgbClr val="C9CFD8"/>
+            </a:solidFill>
+            <a:prstDash val="solid"/>
+          </a:ln>
+        </p:spPr>
+      </p:sp>
+      <p:sp>
+        <p:nvSpPr>
+          <p:cNvPr id="7" name="stattext-190"/>
+          <p:cNvSpPr txBox="1"/>
+          <p:nvPr/>
+        </p:nvSpPr>
+        <p:spPr>
+          <a:xfrm>
+            <a:off x="2670048" y="1325880"/>
+            <a:ext cx="1737360" cy="868680"/>
+          </a:xfrm>
+          <a:prstGeom prst="rect">
+            <a:avLst/>
+          </a:prstGeom>
+          <a:noFill/>
+          <a:ln/>
+        </p:spPr>
+        <p:txBody>
+          <a:bodyPr wrap="square" lIns="0" tIns="0" rIns="0" bIns="0" rtlCol="0" anchor="ctr"/>
+          <a:lstStyle/>
+          <a:p>
+            <a:pPr indent="0" marL="0">
+              <a:buNone/>
+            </a:pPr>
+            <a:r>
+              <a:rPr lang="en-US" sz="2000" b="1" dirty="0">
+                <a:solidFill>
+                  <a:srgbClr val="1D2330"/>
+                </a:solidFill>
+              </a:rPr>
+              <a:t>3 / 3</a:t>
+            </a:r>
+            <a:endParaRPr lang="en-US" sz="2000" dirty="0"/>
+          </a:p>
+          <a:p>
+            <a:pPr indent="0" marL="0">
+              <a:buNone/>
+            </a:pPr>
+            <a:r>
+              <a:rPr lang="en-US" sz="1100" dirty="0">
+                <a:solidFill>
+                  <a:srgbClr val="4A5366"/>
+                </a:solidFill>
+              </a:rPr>
+              <a:t>OpenCV 개수 · 17ms</a:t>
+            </a:r>
+            <a:endParaRPr lang="en-US" sz="2000" dirty="0"/>
+          </a:p>
+        </p:txBody>
+      </p:sp>
+      <p:sp>
+        <p:nvSpPr>
+          <p:cNvPr id="8" name="stat-191"/>
+          <p:cNvSpPr/>
+          <p:nvPr/>
+        </p:nvSpPr>
+        <p:spPr>
+          <a:xfrm>
+            <a:off x="4663440" y="1280160"/>
+            <a:ext cx="1920240" cy="960120"/>
+          </a:xfrm>
+          <a:prstGeom prst="roundRect">
+            <a:avLst>
+              <a:gd name="adj" fmla="val 7619"/>
+            </a:avLst>
+          </a:prstGeom>
+          <a:solidFill>
+            <a:srgbClr val="F3F5F8"/>
+          </a:solidFill>
+          <a:ln w="12700">
+            <a:solidFill>
+              <a:srgbClr val="C9CFD8"/>
+            </a:solidFill>
+            <a:prstDash val="solid"/>
+          </a:ln>
+        </p:spPr>
+      </p:sp>
+      <p:sp>
+        <p:nvSpPr>
+          <p:cNvPr id="9" name="stattext-192"/>
+          <p:cNvSpPr txBox="1"/>
+          <p:nvPr/>
+        </p:nvSpPr>
+        <p:spPr>
+          <a:xfrm>
+            <a:off x="4773168" y="1325880"/>
+            <a:ext cx="1737360" cy="868680"/>
+          </a:xfrm>
+          <a:prstGeom prst="rect">
+            <a:avLst/>
+          </a:prstGeom>
+          <a:noFill/>
+          <a:ln/>
+        </p:spPr>
+        <p:txBody>
+          <a:bodyPr wrap="square" lIns="0" tIns="0" rIns="0" bIns="0" rtlCol="0" anchor="ctr"/>
+          <a:lstStyle/>
+          <a:p>
+            <a:pPr indent="0" marL="0">
+              <a:buNone/>
+            </a:pPr>
+            <a:r>
+              <a:rPr lang="en-US" sz="2000" b="1" dirty="0">
+                <a:solidFill>
+                  <a:srgbClr val="1D2330"/>
+                </a:solidFill>
+              </a:rPr>
+              <a:t>0.14~0.23초</a:t>
+            </a:r>
+            <a:endParaRPr lang="en-US" sz="2000" dirty="0"/>
+          </a:p>
+          <a:p>
+            <a:pPr indent="0" marL="0">
+              <a:buNone/>
+            </a:pPr>
+            <a:r>
+              <a:rPr lang="en-US" sz="1100" dirty="0">
+                <a:solidFill>
+                  <a:srgbClr val="4A5366"/>
+                </a:solidFill>
+              </a:rPr>
+              <a:t>ACT 추론 1회 (CPU)</a:t>
+            </a:r>
+            <a:endParaRPr lang="en-US" sz="2000" dirty="0"/>
+          </a:p>
+        </p:txBody>
+      </p:sp>
+      <p:sp>
+        <p:nvSpPr>
+          <p:cNvPr id="10" name="stat-193"/>
+          <p:cNvSpPr/>
+          <p:nvPr/>
+        </p:nvSpPr>
+        <p:spPr>
+          <a:xfrm>
+            <a:off x="6766560" y="1280160"/>
+            <a:ext cx="1920240" cy="960120"/>
+          </a:xfrm>
+          <a:prstGeom prst="roundRect">
+            <a:avLst>
+              <a:gd name="adj" fmla="val 7619"/>
+            </a:avLst>
+          </a:prstGeom>
+          <a:solidFill>
+            <a:srgbClr val="F3F5F8"/>
+          </a:solidFill>
+          <a:ln w="12700">
+            <a:solidFill>
+              <a:srgbClr val="C9CFD8"/>
+            </a:solidFill>
+            <a:prstDash val="solid"/>
+          </a:ln>
+        </p:spPr>
+      </p:sp>
+      <p:sp>
+        <p:nvSpPr>
+          <p:cNvPr id="11" name="stattext-194"/>
+          <p:cNvSpPr txBox="1"/>
+          <p:nvPr/>
+        </p:nvSpPr>
+        <p:spPr>
+          <a:xfrm>
+            <a:off x="6876288" y="1325880"/>
+            <a:ext cx="1737360" cy="868680"/>
+          </a:xfrm>
+          <a:prstGeom prst="rect">
+            <a:avLst/>
+          </a:prstGeom>
+          <a:noFill/>
+          <a:ln/>
+        </p:spPr>
+        <p:txBody>
+          <a:bodyPr wrap="square" lIns="0" tIns="0" rIns="0" bIns="0" rtlCol="0" anchor="ctr"/>
+          <a:lstStyle/>
+          <a:p>
+            <a:pPr indent="0" marL="0">
+              <a:buNone/>
+            </a:pPr>
+            <a:r>
+              <a:rPr lang="en-US" sz="2000" b="1" dirty="0">
+                <a:solidFill>
+                  <a:srgbClr val="1D2330"/>
+                </a:solidFill>
+              </a:rPr>
+              <a:t>469+</a:t>
+            </a:r>
+            <a:endParaRPr lang="en-US" sz="2000" dirty="0"/>
+          </a:p>
+          <a:p>
+            <a:pPr indent="0" marL="0">
+              <a:buNone/>
+            </a:pPr>
+            <a:r>
+              <a:rPr lang="en-US" sz="1100" dirty="0">
+                <a:solidFill>
+                  <a:srgbClr val="4A5366"/>
+                </a:solidFill>
+              </a:rPr>
+              <a:t>자동 테스트 통과</a:t>
+            </a:r>
+            <a:endParaRPr lang="en-US" sz="2000" dirty="0"/>
+          </a:p>
+        </p:txBody>
+      </p:sp>
+      <p:graphicFrame>
+        <p:nvGraphicFramePr>
+          <p:cNvPr id="12" name="startup-chart" descr=""/>
+          <p:cNvGraphicFramePr/>
+          <p:nvPr/>
+        </p:nvGraphicFramePr>
+        <p:xfrm>
+          <a:off x="457200" y="2468880"/>
+          <a:ext cx="4206240" cy="2286000"/>
+        </p:xfrm>
+        <a:graphic xmlns:a="http://schemas.openxmlformats.org/drawingml/2006/main">
+          <a:graphicData uri="http://schemas.openxmlformats.org/drawingml/2006/chart">
+            <c:chart xmlns:c="http://schemas.openxmlformats.org/drawingml/2006/chart" r:id="rId1"/>
+          </a:graphicData>
+        </a:graphic>
+      </p:graphicFrame>
+      <p:sp>
+        <p:nvSpPr>
+          <p:cNvPr id="13" name="card-195"/>
+          <p:cNvSpPr/>
+          <p:nvPr/>
+        </p:nvSpPr>
+        <p:spPr>
+          <a:xfrm>
+            <a:off x="4892040" y="2468880"/>
+            <a:ext cx="3794760" cy="2286000"/>
+          </a:xfrm>
+          <a:prstGeom prst="roundRect">
+            <a:avLst>
+              <a:gd name="adj" fmla="val 3200"/>
+            </a:avLst>
+          </a:prstGeom>
+          <a:solidFill>
+            <a:srgbClr val="F3F5F8"/>
+          </a:solidFill>
+          <a:ln w="12700">
+            <a:solidFill>
+              <a:srgbClr val="C9CFD8"/>
+            </a:solidFill>
+            <a:prstDash val="solid"/>
+          </a:ln>
+        </p:spPr>
+      </p:sp>
+      <p:sp>
+        <p:nvSpPr>
+          <p:cNvPr id="14" name="cardtext-196"/>
+          <p:cNvSpPr txBox="1"/>
+          <p:nvPr/>
+        </p:nvSpPr>
+        <p:spPr>
+          <a:xfrm>
+            <a:off x="5001768" y="2542032"/>
+            <a:ext cx="3575304" cy="2139696"/>
+          </a:xfrm>
+          <a:prstGeom prst="rect">
+            <a:avLst/>
+          </a:prstGeom>
+          <a:noFill/>
+          <a:ln/>
+        </p:spPr>
+        <p:txBody>
+          <a:bodyPr wrap="square" lIns="0" tIns="0" rIns="0" bIns="0" rtlCol="0" anchor="t"/>
+          <a:lstStyle/>
+          <a:p>
+            <a:pPr indent="0" marL="0">
+              <a:spcAft>
+                <a:spcPts val="400"/>
+              </a:spcAft>
+              <a:buNone/>
+            </a:pPr>
+            <a:r>
+              <a:rPr lang="en-US" sz="1400" b="1" dirty="0">
+                <a:solidFill>
+                  <a:srgbClr val="1D2330"/>
+                </a:solidFill>
+              </a:rPr>
+              <a:t>현장에서 고친 것</a:t>
+            </a:r>
+            <a:endParaRPr lang="en-US" sz="1400" dirty="0"/>
+          </a:p>
+          <a:p>
+            <a:pPr marL="342900" indent="-342900">
+              <a:spcAft>
+                <a:spcPts val="300"/>
+              </a:spcAft>
+              <a:buSzPct val="100000"/>
+              <a:buChar char="•"/>
+            </a:pPr>
+            <a:r>
+              <a:rPr lang="en-US" sz="1200" dirty="0">
+                <a:solidFill>
+                  <a:srgbClr val="4A5366"/>
+                </a:solidFill>
+              </a:rPr>
+              <a:t>Windows 카메라 목록 오류 → 보정 코드</a:t>
+            </a:r>
+            <a:endParaRPr lang="en-US" sz="1400" dirty="0"/>
+          </a:p>
+          <a:p>
+            <a:pPr marL="342900" indent="-342900">
+              <a:spcAft>
+                <a:spcPts val="300"/>
+              </a:spcAft>
+              <a:buSzPct val="100000"/>
+              <a:buChar char="•"/>
+            </a:pPr>
+            <a:r>
+              <a:rPr lang="en-US" sz="1200" dirty="0">
+                <a:solidFill>
+                  <a:srgbClr val="4A5366"/>
+                </a:solidFill>
+              </a:rPr>
+              <a:t>카메라 3대 동시 열기 실패 → USB 포트 분산</a:t>
+            </a:r>
+            <a:endParaRPr lang="en-US" sz="1400" dirty="0"/>
+          </a:p>
+          <a:p>
+            <a:pPr marL="342900" indent="-342900">
+              <a:spcAft>
+                <a:spcPts val="300"/>
+              </a:spcAft>
+              <a:buSzPct val="100000"/>
+              <a:buChar char="•"/>
+            </a:pPr>
+            <a:r>
+              <a:rPr lang="en-US" sz="1200" dirty="0">
+                <a:solidFill>
+                  <a:srgbClr val="4A5366"/>
+                </a:solidFill>
+              </a:rPr>
+              <a:t>개수 2↔3 흔들림 → 색 마스크 + 5장 중앙값</a:t>
+            </a:r>
+            <a:endParaRPr lang="en-US" sz="1400" dirty="0"/>
+          </a:p>
+          <a:p>
+            <a:pPr marL="342900" indent="-342900">
+              <a:spcAft>
+                <a:spcPts val="300"/>
+              </a:spcAft>
+              <a:buSzPct val="100000"/>
+              <a:buChar char="•"/>
+            </a:pPr>
+            <a:r>
+              <a:rPr lang="en-US" sz="1200" dirty="0">
+                <a:solidFill>
+                  <a:srgbClr val="4A5366"/>
+                </a:solidFill>
+              </a:rPr>
+              <a:t>판정 오류 → 놓은 뒤 다시 세어 확인</a:t>
+            </a:r>
+            <a:endParaRPr lang="en-US" sz="1400" dirty="0"/>
+          </a:p>
+          <a:p>
+            <a:pPr marL="342900" indent="-342900">
+              <a:spcAft>
+                <a:spcPts val="300"/>
+              </a:spcAft>
+              <a:buSzPct val="100000"/>
+              <a:buChar char="•"/>
+            </a:pPr>
+            <a:r>
+              <a:rPr lang="en-US" sz="1200" dirty="0">
+                <a:solidFill>
+                  <a:srgbClr val="4A5366"/>
+                </a:solidFill>
+              </a:rPr>
+              <a:t>도리도리 모델이 안 흔듦 → 코드 도리도리</a:t>
+            </a:r>
+            <a:endParaRPr lang="en-US" sz="1400" dirty="0"/>
+          </a:p>
+        </p:txBody>
+      </p:sp>
+      <p:sp>
+        <p:nvSpPr>
+          <p:cNvPr id="25" name="Slide Number Placeholder 0"/>
+          <p:cNvSpPr>
+            <a:spLocks noGrp="1"/>
+          </p:cNvSpPr>
+          <p:nvPr>
+            <p:ph type="sldNum" sz="quarter" idx="4294967295"/>
+          </p:nvPr>
+        </p:nvSpPr>
+        <p:spPr>
+          <a:xfrm>
+            <a:off x="8321040" y="4800600"/>
+            <a:ext cx="457200" cy="228600"/>
+          </a:xfrm>
+          <a:prstGeom prst="rect">
+            <a:avLst/>
+          </a:prstGeom>
+          <a:extLst>
+            <a:ext uri="{C572A759-6A51-4108-AA02-DFA0A04FC94B}">
+              <ma14:wrappingTextBoxFlag xmlns:ma14="http://schemas.microsoft.com/office/mac/drawingml/2011/main" val="0"/>
+            </a:ext>
+          </a:extLst>
+        </p:spPr>
+        <p:txBody>
+          <a:bodyPr/>
+          <a:lstStyle>
+            <a:lvl1pPr>
+              <a:defRPr sz="1000">
+                <a:solidFill>
+                  <a:srgbClr val="7A8394"/>
+                </a:solidFill>
+              </a:defRPr>
+            </a:lvl1pPr>
+          </a:lstStyle>
+          <a:p>
+            <a:pPr algn="r"/>
+            <a:fld id="{F7021451-1387-4CA6-816F-3879F97B5CBC}" type="slidenum">
+              <a:rPr b="0" lang="en-US"/>
+              <a:t>10</a:t>
+            </a:fld>
+            <a:endParaRPr lang="en-US"/>
+          </a:p>
+        </p:txBody>
+      </p:sp>
+    </p:spTree>
+  </p:cSld>
+  <p:clrMapOvr>
+    <a:masterClrMapping/>
+  </p:clrMapOvr>
+</p:sld>
+</file>
+
+<file path=ppt/slides/slide11.xml><?xml version="1.0" encoding="utf-8"?>
+<p:sld xmlns:a="http://schemas.openxmlformats.org/drawingml/2006/main" xmlns:r="http://schemas.openxmlformats.org/officeDocument/2006/relationships" xmlns:p="http://schemas.openxmlformats.org/presentationml/2006/main">
+  <p:cSld name="Slide 11">
+    <p:spTree>
+      <p:nvGrpSpPr>
+        <p:cNvPr id="1" name=""/>
+        <p:cNvGrpSpPr/>
+        <p:nvPr/>
+      </p:nvGrpSpPr>
+      <p:grpSpPr>
+        <a:xfrm>
+          <a:off x="0" y="0"/>
+          <a:ext cx="0" cy="0"/>
+          <a:chOff x="0" y="0"/>
+          <a:chExt cx="0" cy="0"/>
+        </a:xfrm>
+      </p:grpSpPr>
+      <p:sp>
+        <p:nvSpPr>
+          <p:cNvPr id="2" name="Text 0"/>
           <p:cNvSpPr txBox="1"/>
           <p:nvPr/>
         </p:nvSpPr>
@@ -2833,7 +3549,7 @@
       </p:sp>
       <p:sp>
         <p:nvSpPr>
-          <p:cNvPr id="3" name="wrapcard-184"/>
+          <p:cNvPr id="3" name="wrapcard-197"/>
           <p:cNvSpPr/>
           <p:nvPr/>
         </p:nvSpPr>
@@ -2860,7 +3576,7 @@
       </p:sp>
       <p:sp>
         <p:nvSpPr>
-          <p:cNvPr id="4" name="wraptext-185"/>
+          <p:cNvPr id="4" name="wraptext-198"/>
           <p:cNvSpPr txBox="1"/>
           <p:nvPr/>
         </p:nvSpPr>
@@ -2971,7 +3687,7 @@
       </p:sp>
       <p:sp>
         <p:nvSpPr>
-          <p:cNvPr id="5" name="wrapcard-186"/>
+          <p:cNvPr id="5" name="wrapcard-199"/>
           <p:cNvSpPr/>
           <p:nvPr/>
         </p:nvSpPr>
@@ -2998,7 +3714,7 @@
       </p:sp>
       <p:sp>
         <p:nvSpPr>
-          <p:cNvPr id="6" name="wraptext-187"/>
+          <p:cNvPr id="6" name="wraptext-200"/>
           <p:cNvSpPr txBox="1"/>
           <p:nvPr/>
         </p:nvSpPr>
@@ -3047,7 +3763,7 @@
                   <a:srgbClr val="E8EBF0"/>
                 </a:solidFill>
               </a:rPr>
-              <a:t>제어 주기 11~13Hz → 30Hz (학습 조건과 맞추기)</a:t>
+              <a:t>오란다 모델 더 학습 (에포크 5 → 늘리기)</a:t>
             </a:r>
             <a:endParaRPr lang="en-US" sz="1700" dirty="0"/>
           </a:p>
@@ -3065,7 +3781,7 @@
                   <a:srgbClr val="E8EBF0"/>
                 </a:solidFill>
               </a:rPr>
-              <a:t>전체 흐름 리허설: 시작 → 거부 → 달래기 → 완료</a:t>
+              <a:t>도리도리 10~20 에피소드 다시 녹화</a:t>
             </a:r>
             <a:endParaRPr lang="en-US" sz="1700" dirty="0"/>
           </a:p>
@@ -3083,7 +3799,7 @@
                   <a:srgbClr val="E8EBF0"/>
                 </a:solidFill>
               </a:rPr>
-              <a:t>VLM으로 개수 세기 비교</a:t>
+              <a:t>제어 주기 11~13Hz → 30Hz (학습 조건과 맞추기)</a:t>
             </a:r>
             <a:endParaRPr lang="en-US" sz="1700" dirty="0"/>
           </a:p>
@@ -3101,7 +3817,7 @@
                   <a:srgbClr val="E8EBF0"/>
                 </a:solidFill>
               </a:rPr>
-              <a:t>도리도리 데이터 다시 녹화해 모델 개선</a:t>
+              <a:t>전체 흐름 리허설 · VLM 개수 세기 비교</a:t>
             </a:r>
             <a:endParaRPr lang="en-US" sz="1700" dirty="0"/>
           </a:p>
@@ -8842,7 +9558,7 @@
                   <a:schemeClr val="tx1"/>
                 </a:solidFill>
               </a:rPr>
-              <a:t>행동: ACT 정책을 OpenVINO로</a:t>
+              <a:t>데이터셋과 학습</a:t>
             </a:r>
             <a:endParaRPr lang="en-US" sz="3000" dirty="0"/>
           </a:p>
@@ -8880,26 +9596,86 @@
                   <a:schemeClr val="tx2"/>
                 </a:solidFill>
               </a:rPr>
-              <a:t>physical-ai-studio에서 녹화 · 학습 → OpenVINO로 내보내 노트북 CPU에서 추론</a:t>
+              <a:t>사람이 리더 팔로 보여 주면(텔레옵) 로봇이 따라 배운다 · physical-ai-studio에서 ACT 학습</a:t>
             </a:r>
             <a:endParaRPr lang="en-US" sz="1400" dirty="0"/>
           </a:p>
         </p:txBody>
       </p:sp>
-      <p:sp>
-        <p:nvSpPr>
-          <p:cNvPr id="4" name="box-138"/>
-          <p:cNvSpPr/>
-          <p:nvPr/>
-        </p:nvSpPr>
-        <p:spPr>
-          <a:xfrm>
-            <a:off x="457200" y="1280160"/>
-            <a:ext cx="1828800" cy="731520"/>
+      <p:pic>
+        <p:nvPicPr>
+          <p:cNvPr id="4" name="training-photo" descr="녹화 현장: 검은 매트 위 과자와 트레이, 로봇팔, 카메라 거치대 두 개, 노트북">    </p:cNvPr>
+          <p:cNvPicPr>
+            <a:picLocks noChangeAspect="1"/>
+          </p:cNvPicPr>
+          <p:nvPr/>
+        </p:nvPicPr>
+        <p:blipFill>
+          <a:blip r:embed="rId1"/>
+          <a:stretch>
+            <a:fillRect/>
+          </a:stretch>
+        </p:blipFill>
+        <p:spPr>
+          <a:xfrm>
+            <a:off x="457200" y="1234440"/>
+            <a:ext cx="2331720" cy="3108960"/>
+          </a:xfrm>
+          <a:prstGeom prst="rect">
+            <a:avLst/>
+          </a:prstGeom>
+        </p:spPr>
+      </p:pic>
+      <p:sp>
+        <p:nvSpPr>
+          <p:cNvPr id="5" name="Text 2"/>
+          <p:cNvSpPr txBox="1"/>
+          <p:nvPr/>
+        </p:nvSpPr>
+        <p:spPr>
+          <a:xfrm>
+            <a:off x="457200" y="4389120"/>
+            <a:ext cx="2331720" cy="274320"/>
+          </a:xfrm>
+          <a:prstGeom prst="rect">
+            <a:avLst/>
+          </a:prstGeom>
+          <a:noFill/>
+          <a:ln/>
+        </p:spPr>
+        <p:txBody>
+          <a:bodyPr wrap="square" lIns="0" tIns="0" rIns="0" bIns="0" rtlCol="0" anchor="ctr"/>
+          <a:lstStyle/>
+          <a:p>
+            <a:pPr indent="0" marL="0">
+              <a:buNone/>
+            </a:pPr>
+            <a:r>
+              <a:rPr lang="en-US" sz="1000" dirty="0">
+                <a:solidFill>
+                  <a:srgbClr val="7A8394"/>
+                </a:solidFill>
+              </a:rPr>
+              <a:t>녹화 현장 · 위쪽·사이드 카메라 거치대</a:t>
+            </a:r>
+            <a:endParaRPr lang="en-US" sz="1000" dirty="0"/>
+          </a:p>
+        </p:txBody>
+      </p:sp>
+      <p:sp>
+        <p:nvSpPr>
+          <p:cNvPr id="6" name="box-138"/>
+          <p:cNvSpPr/>
+          <p:nvPr/>
+        </p:nvSpPr>
+        <p:spPr>
+          <a:xfrm>
+            <a:off x="3017520" y="1234440"/>
+            <a:ext cx="1280160" cy="685800"/>
           </a:xfrm>
           <a:prstGeom prst="roundRect">
             <a:avLst>
-              <a:gd name="adj" fmla="val 10000"/>
+              <a:gd name="adj" fmla="val 10667"/>
             </a:avLst>
           </a:prstGeom>
           <a:solidFill>
@@ -8915,14 +9691,14 @@
       </p:sp>
       <p:sp>
         <p:nvSpPr>
-          <p:cNvPr id="5" name="boxtext-139"/>
+          <p:cNvPr id="7" name="boxtext-139"/>
           <p:cNvSpPr txBox="1"/>
           <p:nvPr/>
         </p:nvSpPr>
         <p:spPr>
           <a:xfrm>
-            <a:off x="457200" y="1280160"/>
-            <a:ext cx="1828800" cy="731520"/>
+            <a:off x="3017520" y="1234440"/>
+            <a:ext cx="1280160" cy="685800"/>
           </a:xfrm>
           <a:prstGeom prst="rect">
             <a:avLst/>
@@ -8938,14 +9714,14 @@
               <a:buNone/>
             </a:pPr>
             <a:r>
-              <a:rPr lang="en-US" sz="1500" b="1" dirty="0">
+              <a:rPr lang="en-US" sz="1300" b="1" dirty="0">
                 <a:solidFill>
                   <a:srgbClr val="1D2330"/>
                 </a:solidFill>
               </a:rPr>
-              <a:t>녹화</a:t>
-            </a:r>
-            <a:endParaRPr lang="en-US" sz="1500" dirty="0"/>
+              <a:t>텔레옵 녹화</a:t>
+            </a:r>
+            <a:endParaRPr lang="en-US" sz="1300" dirty="0"/>
           </a:p>
           <a:p>
             <a:pPr algn="ctr" indent="0" marL="0">
@@ -8957,22 +9733,22 @@
                   <a:srgbClr val="4A5366"/>
                 </a:solidFill>
               </a:rPr>
-              <a:t>리더 팔 텔레옵 · 31 에피소드</a:t>
-            </a:r>
-            <a:endParaRPr lang="en-US" sz="1500" dirty="0"/>
-          </a:p>
-        </p:txBody>
-      </p:sp>
-      <p:sp>
-        <p:nvSpPr>
-          <p:cNvPr id="6" name="arrow-140"/>
-          <p:cNvSpPr/>
-          <p:nvPr/>
-        </p:nvSpPr>
-        <p:spPr>
-          <a:xfrm>
-            <a:off x="2286000" y="1645920"/>
-            <a:ext cx="301752" cy="914"/>
+              <a:t>30fps 시범</a:t>
+            </a:r>
+            <a:endParaRPr lang="en-US" sz="1300" dirty="0"/>
+          </a:p>
+        </p:txBody>
+      </p:sp>
+      <p:sp>
+        <p:nvSpPr>
+          <p:cNvPr id="8" name="arrow-140"/>
+          <p:cNvSpPr/>
+          <p:nvPr/>
+        </p:nvSpPr>
+        <p:spPr>
+          <a:xfrm>
+            <a:off x="4297680" y="1572768"/>
+            <a:ext cx="155448" cy="914"/>
           </a:xfrm>
           <a:prstGeom prst="line">
             <a:avLst/>
@@ -8989,26 +9765,26 @@
       </p:sp>
       <p:sp>
         <p:nvSpPr>
-          <p:cNvPr id="7" name="box-141"/>
-          <p:cNvSpPr/>
-          <p:nvPr/>
-        </p:nvSpPr>
-        <p:spPr>
-          <a:xfrm>
-            <a:off x="2587752" y="1280160"/>
-            <a:ext cx="1828800" cy="731520"/>
+          <p:cNvPr id="9" name="box-141"/>
+          <p:cNvSpPr/>
+          <p:nvPr/>
+        </p:nvSpPr>
+        <p:spPr>
+          <a:xfrm>
+            <a:off x="4453128" y="1234440"/>
+            <a:ext cx="1280160" cy="685800"/>
           </a:xfrm>
           <a:prstGeom prst="roundRect">
             <a:avLst>
-              <a:gd name="adj" fmla="val 10000"/>
+              <a:gd name="adj" fmla="val 10667"/>
             </a:avLst>
           </a:prstGeom>
           <a:solidFill>
-            <a:srgbClr val="E3EAFC"/>
+            <a:srgbClr val="DFF3E7"/>
           </a:solidFill>
           <a:ln w="19050">
             <a:solidFill>
-              <a:srgbClr val="2F5BD8"/>
+              <a:srgbClr val="1B7F4B"/>
             </a:solidFill>
             <a:prstDash val="solid"/>
           </a:ln>
@@ -9016,14 +9792,14 @@
       </p:sp>
       <p:sp>
         <p:nvSpPr>
-          <p:cNvPr id="8" name="boxtext-142"/>
+          <p:cNvPr id="10" name="boxtext-142"/>
           <p:cNvSpPr txBox="1"/>
           <p:nvPr/>
         </p:nvSpPr>
         <p:spPr>
           <a:xfrm>
-            <a:off x="2587752" y="1280160"/>
-            <a:ext cx="1828800" cy="731520"/>
+            <a:off x="4453128" y="1234440"/>
+            <a:ext cx="1280160" cy="685800"/>
           </a:xfrm>
           <a:prstGeom prst="rect">
             <a:avLst/>
@@ -9039,14 +9815,14 @@
               <a:buNone/>
             </a:pPr>
             <a:r>
-              <a:rPr lang="en-US" sz="1500" b="1" dirty="0">
+              <a:rPr lang="en-US" sz="1300" b="1" dirty="0">
                 <a:solidFill>
                   <a:srgbClr val="1D2330"/>
                 </a:solidFill>
               </a:rPr>
-              <a:t>학습</a:t>
-            </a:r>
-            <a:endParaRPr lang="en-US" sz="1500" dirty="0"/>
+              <a:t>데이터셋</a:t>
+            </a:r>
+            <a:endParaRPr lang="en-US" sz="1300" dirty="0"/>
           </a:p>
           <a:p>
             <a:pPr algn="ctr" indent="0" marL="0">
@@ -9058,22 +9834,22 @@
                   <a:srgbClr val="4A5366"/>
                 </a:solidFill>
               </a:rPr>
-              <a:t>ACT (ResNet18) · chunk 100</a:t>
-            </a:r>
-            <a:endParaRPr lang="en-US" sz="1500" dirty="0"/>
-          </a:p>
-        </p:txBody>
-      </p:sp>
-      <p:sp>
-        <p:nvSpPr>
-          <p:cNvPr id="9" name="arrow-143"/>
-          <p:cNvSpPr/>
-          <p:nvPr/>
-        </p:nvSpPr>
-        <p:spPr>
-          <a:xfrm>
-            <a:off x="4416552" y="1645920"/>
-            <a:ext cx="301752" cy="914"/>
+              <a:t>관절 6 + 카메라 3</a:t>
+            </a:r>
+            <a:endParaRPr lang="en-US" sz="1300" dirty="0"/>
+          </a:p>
+        </p:txBody>
+      </p:sp>
+      <p:sp>
+        <p:nvSpPr>
+          <p:cNvPr id="11" name="arrow-143"/>
+          <p:cNvSpPr/>
+          <p:nvPr/>
+        </p:nvSpPr>
+        <p:spPr>
+          <a:xfrm>
+            <a:off x="5733288" y="1572768"/>
+            <a:ext cx="155448" cy="914"/>
           </a:xfrm>
           <a:prstGeom prst="line">
             <a:avLst/>
@@ -9090,18 +9866,18 @@
       </p:sp>
       <p:sp>
         <p:nvSpPr>
-          <p:cNvPr id="10" name="box-144"/>
-          <p:cNvSpPr/>
-          <p:nvPr/>
-        </p:nvSpPr>
-        <p:spPr>
-          <a:xfrm>
-            <a:off x="4718304" y="1280160"/>
-            <a:ext cx="1828800" cy="731520"/>
+          <p:cNvPr id="12" name="box-144"/>
+          <p:cNvSpPr/>
+          <p:nvPr/>
+        </p:nvSpPr>
+        <p:spPr>
+          <a:xfrm>
+            <a:off x="5888736" y="1234440"/>
+            <a:ext cx="1280160" cy="685800"/>
           </a:xfrm>
           <a:prstGeom prst="roundRect">
             <a:avLst>
-              <a:gd name="adj" fmla="val 10000"/>
+              <a:gd name="adj" fmla="val 10667"/>
             </a:avLst>
           </a:prstGeom>
           <a:solidFill>
@@ -9117,14 +9893,14 @@
       </p:sp>
       <p:sp>
         <p:nvSpPr>
-          <p:cNvPr id="11" name="boxtext-145"/>
+          <p:cNvPr id="13" name="boxtext-145"/>
           <p:cNvSpPr txBox="1"/>
           <p:nvPr/>
         </p:nvSpPr>
         <p:spPr>
           <a:xfrm>
-            <a:off x="4718304" y="1280160"/>
-            <a:ext cx="1828800" cy="731520"/>
+            <a:off x="5888736" y="1234440"/>
+            <a:ext cx="1280160" cy="685800"/>
           </a:xfrm>
           <a:prstGeom prst="rect">
             <a:avLst/>
@@ -9140,14 +9916,14 @@
               <a:buNone/>
             </a:pPr>
             <a:r>
-              <a:rPr lang="en-US" sz="1500" b="1" dirty="0">
+              <a:rPr lang="en-US" sz="1300" b="1" dirty="0">
                 <a:solidFill>
                   <a:srgbClr val="1D2330"/>
                 </a:solidFill>
               </a:rPr>
-              <a:t>내보내기</a:t>
-            </a:r>
-            <a:endParaRPr lang="en-US" sz="1500" dirty="0"/>
+              <a:t>ACT 학습</a:t>
+            </a:r>
+            <a:endParaRPr lang="en-US" sz="1300" dirty="0"/>
           </a:p>
           <a:p>
             <a:pPr algn="ctr" indent="0" marL="0">
@@ -9159,22 +9935,22 @@
                   <a:srgbClr val="4A5366"/>
                 </a:solidFill>
               </a:rPr>
-              <a:t>OpenVINO IR (act.xml)</a:t>
-            </a:r>
-            <a:endParaRPr lang="en-US" sz="1500" dirty="0"/>
-          </a:p>
-        </p:txBody>
-      </p:sp>
-      <p:sp>
-        <p:nvSpPr>
-          <p:cNvPr id="12" name="arrow-146"/>
-          <p:cNvSpPr/>
-          <p:nvPr/>
-        </p:nvSpPr>
-        <p:spPr>
-          <a:xfrm>
-            <a:off x="6547104" y="1645920"/>
-            <a:ext cx="301752" cy="914"/>
+              <a:t>Studio · ResNet18</a:t>
+            </a:r>
+            <a:endParaRPr lang="en-US" sz="1300" dirty="0"/>
+          </a:p>
+        </p:txBody>
+      </p:sp>
+      <p:sp>
+        <p:nvSpPr>
+          <p:cNvPr id="14" name="arrow-146"/>
+          <p:cNvSpPr/>
+          <p:nvPr/>
+        </p:nvSpPr>
+        <p:spPr>
+          <a:xfrm>
+            <a:off x="7168896" y="1572768"/>
+            <a:ext cx="155448" cy="914"/>
           </a:xfrm>
           <a:prstGeom prst="line">
             <a:avLst/>
@@ -9191,18 +9967,18 @@
       </p:sp>
       <p:sp>
         <p:nvSpPr>
-          <p:cNvPr id="13" name="box-147"/>
-          <p:cNvSpPr/>
-          <p:nvPr/>
-        </p:nvSpPr>
-        <p:spPr>
-          <a:xfrm>
-            <a:off x="6848856" y="1280160"/>
-            <a:ext cx="1828800" cy="731520"/>
+          <p:cNvPr id="15" name="box-147"/>
+          <p:cNvSpPr/>
+          <p:nvPr/>
+        </p:nvSpPr>
+        <p:spPr>
+          <a:xfrm>
+            <a:off x="7324344" y="1234440"/>
+            <a:ext cx="1280160" cy="685800"/>
           </a:xfrm>
           <a:prstGeom prst="roundRect">
             <a:avLst>
-              <a:gd name="adj" fmla="val 10000"/>
+              <a:gd name="adj" fmla="val 10667"/>
             </a:avLst>
           </a:prstGeom>
           <a:solidFill>
@@ -9218,14 +9994,14 @@
       </p:sp>
       <p:sp>
         <p:nvSpPr>
-          <p:cNvPr id="14" name="boxtext-148"/>
+          <p:cNvPr id="16" name="boxtext-148"/>
           <p:cNvSpPr txBox="1"/>
           <p:nvPr/>
         </p:nvSpPr>
         <p:spPr>
           <a:xfrm>
-            <a:off x="6848856" y="1280160"/>
-            <a:ext cx="1828800" cy="731520"/>
+            <a:off x="7324344" y="1234440"/>
+            <a:ext cx="1280160" cy="685800"/>
           </a:xfrm>
           <a:prstGeom prst="rect">
             <a:avLst/>
@@ -9241,14 +10017,14 @@
               <a:buNone/>
             </a:pPr>
             <a:r>
-              <a:rPr lang="en-US" sz="1500" b="1" dirty="0">
+              <a:rPr lang="en-US" sz="1300" b="1" dirty="0">
                 <a:solidFill>
                   <a:srgbClr val="1D2330"/>
                 </a:solidFill>
               </a:rPr>
-              <a:t>실행</a:t>
-            </a:r>
-            <a:endParaRPr lang="en-US" sz="1500" dirty="0"/>
+              <a:t>내보내기</a:t>
+            </a:r>
+            <a:endParaRPr lang="en-US" sz="1300" dirty="0"/>
           </a:p>
           <a:p>
             <a:pPr algn="ctr" indent="0" marL="0">
@@ -9260,26 +10036,1094 @@
                   <a:srgbClr val="4A5366"/>
                 </a:solidFill>
               </a:rPr>
-              <a:t>physicalai 런타임 · CPU</a:t>
-            </a:r>
-            <a:endParaRPr lang="en-US" sz="1500" dirty="0"/>
-          </a:p>
-        </p:txBody>
-      </p:sp>
-      <p:sp>
-        <p:nvSpPr>
-          <p:cNvPr id="15" name="grip-card"/>
-          <p:cNvSpPr/>
-          <p:nvPr/>
-        </p:nvSpPr>
-        <p:spPr>
-          <a:xfrm>
-            <a:off x="457200" y="2286000"/>
-            <a:ext cx="4114800" cy="2468880"/>
+              <a:t>OpenVINO IR</a:t>
+            </a:r>
+            <a:endParaRPr lang="en-US" sz="1300" dirty="0"/>
+          </a:p>
+        </p:txBody>
+      </p:sp>
+      <p:graphicFrame>
+        <p:nvGraphicFramePr>
+          <p:cNvPr id="8" name="train-table"/>
+          <p:cNvGraphicFramePr>
+            <a:graphicFrameLocks noGrp="1"/>
+          </p:cNvGraphicFramePr>
+          <p:nvPr>
+            <p:extLst>
+              <p:ext uri="{D42A27DB-BD31-4B8C-83A1-F6EECF244321}">
+                <p14:modId xmlns:p14="http://schemas.microsoft.com/office/powerpoint/2010/main" val="1579011935"/>
+              </p:ext>
+            </p:extLst>
+          </p:nvPr>
+        </p:nvGraphicFramePr>
+        <p:xfrm>
+          <a:off x="3017520" y="2103120"/>
+          <a:ext cx="3657600" cy="914400"/>
+        </p:xfrm>
+        <a:graphic>
+          <a:graphicData uri="http://schemas.openxmlformats.org/drawingml/2006/table">
+            <a:tbl>
+              <a:tblPr/>
+              <a:tblGrid>
+                <a:gridCol w="777240"/>
+                <a:gridCol w="1508760"/>
+                <a:gridCol w="1371600"/>
+              </a:tblGrid>
+              <a:tr h="329184">
+                <a:tc>
+                  <a:txBody>
+                    <a:bodyPr/>
+                    <a:lstStyle/>
+                    <a:p>
+                      <a:pPr indent="0" marL="0">
+                        <a:buNone/>
+                      </a:pPr>
+                      <a:endParaRPr lang="en-US" sz="1000" dirty="0"/>
+                    </a:p>
+                  </a:txBody>
+                  <a:tcPr marL="91440" marR="91440" marT="45720" marB="45720" anchor="ctr">
+                    <a:lnL w="9525" cap="flat" cmpd="sng" algn="ctr">
+                      <a:solidFill>
+                        <a:srgbClr val="C9CFD8"/>
+                      </a:solidFill>
+                      <a:prstDash val="solid"/>
+                      <a:round/>
+                      <a:headEnd type="none" w="med" len="med"/>
+                      <a:tailEnd type="none" w="med" len="med"/>
+                    </a:lnL>
+                    <a:lnR w="9525" cap="flat" cmpd="sng" algn="ctr">
+                      <a:solidFill>
+                        <a:srgbClr val="C9CFD8"/>
+                      </a:solidFill>
+                      <a:prstDash val="solid"/>
+                      <a:round/>
+                      <a:headEnd type="none" w="med" len="med"/>
+                      <a:tailEnd type="none" w="med" len="med"/>
+                    </a:lnR>
+                    <a:lnT w="9525" cap="flat" cmpd="sng" algn="ctr">
+                      <a:solidFill>
+                        <a:srgbClr val="C9CFD8"/>
+                      </a:solidFill>
+                      <a:prstDash val="solid"/>
+                      <a:round/>
+                      <a:headEnd type="none" w="med" len="med"/>
+                      <a:tailEnd type="none" w="med" len="med"/>
+                    </a:lnT>
+                    <a:lnB w="9525" cap="flat" cmpd="sng" algn="ctr">
+                      <a:solidFill>
+                        <a:srgbClr val="C9CFD8"/>
+                      </a:solidFill>
+                      <a:prstDash val="solid"/>
+                      <a:round/>
+                      <a:headEnd type="none" w="med" len="med"/>
+                      <a:tailEnd type="none" w="med" len="med"/>
+                    </a:lnB>
+                    <a:solidFill>
+                      <a:srgbClr val="F3F5F8"/>
+                    </a:solidFill>
+                  </a:tcPr>
+                </a:tc>
+                <a:tc>
+                  <a:txBody>
+                    <a:bodyPr/>
+                    <a:lstStyle/>
+                    <a:p>
+                      <a:pPr indent="0" marL="0">
+                        <a:buNone/>
+                      </a:pPr>
+                      <a:r>
+                        <a:rPr lang="en-US" sz="1000" b="1" dirty="0">
+                          <a:solidFill>
+                            <a:srgbClr val="1D2330"/>
+                          </a:solidFill>
+                        </a:rPr>
+                        <a:t>오란다 집기</a:t>
+                      </a:r>
+                      <a:endParaRPr lang="en-US" sz="1000" dirty="0"/>
+                    </a:p>
+                  </a:txBody>
+                  <a:tcPr marL="91440" marR="91440" marT="45720" marB="45720" anchor="ctr">
+                    <a:lnL w="9525" cap="flat" cmpd="sng" algn="ctr">
+                      <a:solidFill>
+                        <a:srgbClr val="C9CFD8"/>
+                      </a:solidFill>
+                      <a:prstDash val="solid"/>
+                      <a:round/>
+                      <a:headEnd type="none" w="med" len="med"/>
+                      <a:tailEnd type="none" w="med" len="med"/>
+                    </a:lnL>
+                    <a:lnR w="9525" cap="flat" cmpd="sng" algn="ctr">
+                      <a:solidFill>
+                        <a:srgbClr val="C9CFD8"/>
+                      </a:solidFill>
+                      <a:prstDash val="solid"/>
+                      <a:round/>
+                      <a:headEnd type="none" w="med" len="med"/>
+                      <a:tailEnd type="none" w="med" len="med"/>
+                    </a:lnR>
+                    <a:lnT w="9525" cap="flat" cmpd="sng" algn="ctr">
+                      <a:solidFill>
+                        <a:srgbClr val="C9CFD8"/>
+                      </a:solidFill>
+                      <a:prstDash val="solid"/>
+                      <a:round/>
+                      <a:headEnd type="none" w="med" len="med"/>
+                      <a:tailEnd type="none" w="med" len="med"/>
+                    </a:lnT>
+                    <a:lnB w="9525" cap="flat" cmpd="sng" algn="ctr">
+                      <a:solidFill>
+                        <a:srgbClr val="C9CFD8"/>
+                      </a:solidFill>
+                      <a:prstDash val="solid"/>
+                      <a:round/>
+                      <a:headEnd type="none" w="med" len="med"/>
+                      <a:tailEnd type="none" w="med" len="med"/>
+                    </a:lnB>
+                    <a:solidFill>
+                      <a:srgbClr val="F3F5F8"/>
+                    </a:solidFill>
+                  </a:tcPr>
+                </a:tc>
+                <a:tc>
+                  <a:txBody>
+                    <a:bodyPr/>
+                    <a:lstStyle/>
+                    <a:p>
+                      <a:pPr indent="0" marL="0">
+                        <a:buNone/>
+                      </a:pPr>
+                      <a:r>
+                        <a:rPr lang="en-US" sz="1000" b="1" dirty="0">
+                          <a:solidFill>
+                            <a:srgbClr val="1D2330"/>
+                          </a:solidFill>
+                        </a:rPr>
+                        <a:t>도리도리</a:t>
+                      </a:r>
+                      <a:endParaRPr lang="en-US" sz="1000" dirty="0"/>
+                    </a:p>
+                  </a:txBody>
+                  <a:tcPr marL="91440" marR="91440" marT="45720" marB="45720" anchor="ctr">
+                    <a:lnL w="9525" cap="flat" cmpd="sng" algn="ctr">
+                      <a:solidFill>
+                        <a:srgbClr val="C9CFD8"/>
+                      </a:solidFill>
+                      <a:prstDash val="solid"/>
+                      <a:round/>
+                      <a:headEnd type="none" w="med" len="med"/>
+                      <a:tailEnd type="none" w="med" len="med"/>
+                    </a:lnL>
+                    <a:lnR w="9525" cap="flat" cmpd="sng" algn="ctr">
+                      <a:solidFill>
+                        <a:srgbClr val="C9CFD8"/>
+                      </a:solidFill>
+                      <a:prstDash val="solid"/>
+                      <a:round/>
+                      <a:headEnd type="none" w="med" len="med"/>
+                      <a:tailEnd type="none" w="med" len="med"/>
+                    </a:lnR>
+                    <a:lnT w="9525" cap="flat" cmpd="sng" algn="ctr">
+                      <a:solidFill>
+                        <a:srgbClr val="C9CFD8"/>
+                      </a:solidFill>
+                      <a:prstDash val="solid"/>
+                      <a:round/>
+                      <a:headEnd type="none" w="med" len="med"/>
+                      <a:tailEnd type="none" w="med" len="med"/>
+                    </a:lnT>
+                    <a:lnB w="9525" cap="flat" cmpd="sng" algn="ctr">
+                      <a:solidFill>
+                        <a:srgbClr val="C9CFD8"/>
+                      </a:solidFill>
+                      <a:prstDash val="solid"/>
+                      <a:round/>
+                      <a:headEnd type="none" w="med" len="med"/>
+                      <a:tailEnd type="none" w="med" len="med"/>
+                    </a:lnB>
+                    <a:solidFill>
+                      <a:srgbClr val="F3F5F8"/>
+                    </a:solidFill>
+                  </a:tcPr>
+                </a:tc>
+              </a:tr>
+              <a:tr h="329184">
+                <a:tc>
+                  <a:txBody>
+                    <a:bodyPr/>
+                    <a:lstStyle/>
+                    <a:p>
+                      <a:pPr indent="0" marL="0">
+                        <a:buNone/>
+                      </a:pPr>
+                      <a:r>
+                        <a:rPr lang="en-US" sz="1000" dirty="0">
+                          <a:solidFill>
+                            <a:srgbClr val="4A5366"/>
+                          </a:solidFill>
+                        </a:rPr>
+                        <a:t>데이터</a:t>
+                      </a:r>
+                      <a:endParaRPr lang="en-US" sz="1000" dirty="0"/>
+                    </a:p>
+                  </a:txBody>
+                  <a:tcPr marL="91440" marR="91440" marT="45720" marB="45720" anchor="ctr">
+                    <a:lnL w="9525" cap="flat" cmpd="sng" algn="ctr">
+                      <a:solidFill>
+                        <a:srgbClr val="C9CFD8"/>
+                      </a:solidFill>
+                      <a:prstDash val="solid"/>
+                      <a:round/>
+                      <a:headEnd type="none" w="med" len="med"/>
+                      <a:tailEnd type="none" w="med" len="med"/>
+                    </a:lnL>
+                    <a:lnR w="9525" cap="flat" cmpd="sng" algn="ctr">
+                      <a:solidFill>
+                        <a:srgbClr val="C9CFD8"/>
+                      </a:solidFill>
+                      <a:prstDash val="solid"/>
+                      <a:round/>
+                      <a:headEnd type="none" w="med" len="med"/>
+                      <a:tailEnd type="none" w="med" len="med"/>
+                    </a:lnR>
+                    <a:lnT w="9525" cap="flat" cmpd="sng" algn="ctr">
+                      <a:solidFill>
+                        <a:srgbClr val="C9CFD8"/>
+                      </a:solidFill>
+                      <a:prstDash val="solid"/>
+                      <a:round/>
+                      <a:headEnd type="none" w="med" len="med"/>
+                      <a:tailEnd type="none" w="med" len="med"/>
+                    </a:lnT>
+                    <a:lnB w="9525" cap="flat" cmpd="sng" algn="ctr">
+                      <a:solidFill>
+                        <a:srgbClr val="C9CFD8"/>
+                      </a:solidFill>
+                      <a:prstDash val="solid"/>
+                      <a:round/>
+                      <a:headEnd type="none" w="med" len="med"/>
+                      <a:tailEnd type="none" w="med" len="med"/>
+                    </a:lnB>
+                  </a:tcPr>
+                </a:tc>
+                <a:tc>
+                  <a:txBody>
+                    <a:bodyPr/>
+                    <a:lstStyle/>
+                    <a:p>
+                      <a:pPr indent="0" marL="0">
+                        <a:buNone/>
+                      </a:pPr>
+                      <a:r>
+                        <a:rPr lang="en-US" sz="1000" dirty="0">
+                          <a:solidFill>
+                            <a:srgbClr val="4A5366"/>
+                          </a:solidFill>
+                        </a:rPr>
+                        <a:t>31개 · 9,111프레임</a:t>
+                      </a:r>
+                      <a:endParaRPr lang="en-US" sz="1000" dirty="0"/>
+                    </a:p>
+                  </a:txBody>
+                  <a:tcPr marL="91440" marR="91440" marT="45720" marB="45720" anchor="ctr">
+                    <a:lnL w="9525" cap="flat" cmpd="sng" algn="ctr">
+                      <a:solidFill>
+                        <a:srgbClr val="C9CFD8"/>
+                      </a:solidFill>
+                      <a:prstDash val="solid"/>
+                      <a:round/>
+                      <a:headEnd type="none" w="med" len="med"/>
+                      <a:tailEnd type="none" w="med" len="med"/>
+                    </a:lnL>
+                    <a:lnR w="9525" cap="flat" cmpd="sng" algn="ctr">
+                      <a:solidFill>
+                        <a:srgbClr val="C9CFD8"/>
+                      </a:solidFill>
+                      <a:prstDash val="solid"/>
+                      <a:round/>
+                      <a:headEnd type="none" w="med" len="med"/>
+                      <a:tailEnd type="none" w="med" len="med"/>
+                    </a:lnR>
+                    <a:lnT w="9525" cap="flat" cmpd="sng" algn="ctr">
+                      <a:solidFill>
+                        <a:srgbClr val="C9CFD8"/>
+                      </a:solidFill>
+                      <a:prstDash val="solid"/>
+                      <a:round/>
+                      <a:headEnd type="none" w="med" len="med"/>
+                      <a:tailEnd type="none" w="med" len="med"/>
+                    </a:lnT>
+                    <a:lnB w="9525" cap="flat" cmpd="sng" algn="ctr">
+                      <a:solidFill>
+                        <a:srgbClr val="C9CFD8"/>
+                      </a:solidFill>
+                      <a:prstDash val="solid"/>
+                      <a:round/>
+                      <a:headEnd type="none" w="med" len="med"/>
+                      <a:tailEnd type="none" w="med" len="med"/>
+                    </a:lnB>
+                  </a:tcPr>
+                </a:tc>
+                <a:tc>
+                  <a:txBody>
+                    <a:bodyPr/>
+                    <a:lstStyle/>
+                    <a:p>
+                      <a:pPr indent="0" marL="0">
+                        <a:buNone/>
+                      </a:pPr>
+                      <a:r>
+                        <a:rPr lang="en-US" sz="1000" dirty="0">
+                          <a:solidFill>
+                            <a:srgbClr val="4A5366"/>
+                          </a:solidFill>
+                        </a:rPr>
+                        <a:t>약 1천 프레임*</a:t>
+                      </a:r>
+                      <a:endParaRPr lang="en-US" sz="1000" dirty="0"/>
+                    </a:p>
+                  </a:txBody>
+                  <a:tcPr marL="91440" marR="91440" marT="45720" marB="45720" anchor="ctr">
+                    <a:lnL w="9525" cap="flat" cmpd="sng" algn="ctr">
+                      <a:solidFill>
+                        <a:srgbClr val="C9CFD8"/>
+                      </a:solidFill>
+                      <a:prstDash val="solid"/>
+                      <a:round/>
+                      <a:headEnd type="none" w="med" len="med"/>
+                      <a:tailEnd type="none" w="med" len="med"/>
+                    </a:lnL>
+                    <a:lnR w="9525" cap="flat" cmpd="sng" algn="ctr">
+                      <a:solidFill>
+                        <a:srgbClr val="C9CFD8"/>
+                      </a:solidFill>
+                      <a:prstDash val="solid"/>
+                      <a:round/>
+                      <a:headEnd type="none" w="med" len="med"/>
+                      <a:tailEnd type="none" w="med" len="med"/>
+                    </a:lnR>
+                    <a:lnT w="9525" cap="flat" cmpd="sng" algn="ctr">
+                      <a:solidFill>
+                        <a:srgbClr val="C9CFD8"/>
+                      </a:solidFill>
+                      <a:prstDash val="solid"/>
+                      <a:round/>
+                      <a:headEnd type="none" w="med" len="med"/>
+                      <a:tailEnd type="none" w="med" len="med"/>
+                    </a:lnT>
+                    <a:lnB w="9525" cap="flat" cmpd="sng" algn="ctr">
+                      <a:solidFill>
+                        <a:srgbClr val="C9CFD8"/>
+                      </a:solidFill>
+                      <a:prstDash val="solid"/>
+                      <a:round/>
+                      <a:headEnd type="none" w="med" len="med"/>
+                      <a:tailEnd type="none" w="med" len="med"/>
+                    </a:lnB>
+                  </a:tcPr>
+                </a:tc>
+              </a:tr>
+              <a:tr h="329184">
+                <a:tc>
+                  <a:txBody>
+                    <a:bodyPr/>
+                    <a:lstStyle/>
+                    <a:p>
+                      <a:pPr indent="0" marL="0">
+                        <a:buNone/>
+                      </a:pPr>
+                      <a:r>
+                        <a:rPr lang="en-US" sz="1000" dirty="0">
+                          <a:solidFill>
+                            <a:srgbClr val="4A5366"/>
+                          </a:solidFill>
+                        </a:rPr>
+                        <a:t>학습</a:t>
+                      </a:r>
+                      <a:endParaRPr lang="en-US" sz="1000" dirty="0"/>
+                    </a:p>
+                  </a:txBody>
+                  <a:tcPr marL="91440" marR="91440" marT="45720" marB="45720" anchor="ctr">
+                    <a:lnL w="9525" cap="flat" cmpd="sng" algn="ctr">
+                      <a:solidFill>
+                        <a:srgbClr val="C9CFD8"/>
+                      </a:solidFill>
+                      <a:prstDash val="solid"/>
+                      <a:round/>
+                      <a:headEnd type="none" w="med" len="med"/>
+                      <a:tailEnd type="none" w="med" len="med"/>
+                    </a:lnL>
+                    <a:lnR w="9525" cap="flat" cmpd="sng" algn="ctr">
+                      <a:solidFill>
+                        <a:srgbClr val="C9CFD8"/>
+                      </a:solidFill>
+                      <a:prstDash val="solid"/>
+                      <a:round/>
+                      <a:headEnd type="none" w="med" len="med"/>
+                      <a:tailEnd type="none" w="med" len="med"/>
+                    </a:lnR>
+                    <a:lnT w="9525" cap="flat" cmpd="sng" algn="ctr">
+                      <a:solidFill>
+                        <a:srgbClr val="C9CFD8"/>
+                      </a:solidFill>
+                      <a:prstDash val="solid"/>
+                      <a:round/>
+                      <a:headEnd type="none" w="med" len="med"/>
+                      <a:tailEnd type="none" w="med" len="med"/>
+                    </a:lnT>
+                    <a:lnB w="9525" cap="flat" cmpd="sng" algn="ctr">
+                      <a:solidFill>
+                        <a:srgbClr val="C9CFD8"/>
+                      </a:solidFill>
+                      <a:prstDash val="solid"/>
+                      <a:round/>
+                      <a:headEnd type="none" w="med" len="med"/>
+                      <a:tailEnd type="none" w="med" len="med"/>
+                    </a:lnB>
+                  </a:tcPr>
+                </a:tc>
+                <a:tc>
+                  <a:txBody>
+                    <a:bodyPr/>
+                    <a:lstStyle/>
+                    <a:p>
+                      <a:pPr indent="0" marL="0">
+                        <a:buNone/>
+                      </a:pPr>
+                      <a:r>
+                        <a:rPr lang="en-US" sz="1000" dirty="0">
+                          <a:solidFill>
+                            <a:srgbClr val="4A5366"/>
+                          </a:solidFill>
+                        </a:rPr>
+                        <a:t>5 에포크 · 배치 8</a:t>
+                      </a:r>
+                      <a:endParaRPr lang="en-US" sz="1000" dirty="0"/>
+                    </a:p>
+                  </a:txBody>
+                  <a:tcPr marL="91440" marR="91440" marT="45720" marB="45720" anchor="ctr">
+                    <a:lnL w="9525" cap="flat" cmpd="sng" algn="ctr">
+                      <a:solidFill>
+                        <a:srgbClr val="C9CFD8"/>
+                      </a:solidFill>
+                      <a:prstDash val="solid"/>
+                      <a:round/>
+                      <a:headEnd type="none" w="med" len="med"/>
+                      <a:tailEnd type="none" w="med" len="med"/>
+                    </a:lnL>
+                    <a:lnR w="9525" cap="flat" cmpd="sng" algn="ctr">
+                      <a:solidFill>
+                        <a:srgbClr val="C9CFD8"/>
+                      </a:solidFill>
+                      <a:prstDash val="solid"/>
+                      <a:round/>
+                      <a:headEnd type="none" w="med" len="med"/>
+                      <a:tailEnd type="none" w="med" len="med"/>
+                    </a:lnR>
+                    <a:lnT w="9525" cap="flat" cmpd="sng" algn="ctr">
+                      <a:solidFill>
+                        <a:srgbClr val="C9CFD8"/>
+                      </a:solidFill>
+                      <a:prstDash val="solid"/>
+                      <a:round/>
+                      <a:headEnd type="none" w="med" len="med"/>
+                      <a:tailEnd type="none" w="med" len="med"/>
+                    </a:lnT>
+                    <a:lnB w="9525" cap="flat" cmpd="sng" algn="ctr">
+                      <a:solidFill>
+                        <a:srgbClr val="C9CFD8"/>
+                      </a:solidFill>
+                      <a:prstDash val="solid"/>
+                      <a:round/>
+                      <a:headEnd type="none" w="med" len="med"/>
+                      <a:tailEnd type="none" w="med" len="med"/>
+                    </a:lnB>
+                  </a:tcPr>
+                </a:tc>
+                <a:tc>
+                  <a:txBody>
+                    <a:bodyPr/>
+                    <a:lstStyle/>
+                    <a:p>
+                      <a:pPr indent="0" marL="0">
+                        <a:buNone/>
+                      </a:pPr>
+                      <a:r>
+                        <a:rPr lang="en-US" sz="1000" dirty="0">
+                          <a:solidFill>
+                            <a:srgbClr val="4A5366"/>
+                          </a:solidFill>
+                        </a:rPr>
+                        <a:t>100 에포크 · 배치 4</a:t>
+                      </a:r>
+                      <a:endParaRPr lang="en-US" sz="1000" dirty="0"/>
+                    </a:p>
+                  </a:txBody>
+                  <a:tcPr marL="91440" marR="91440" marT="45720" marB="45720" anchor="ctr">
+                    <a:lnL w="9525" cap="flat" cmpd="sng" algn="ctr">
+                      <a:solidFill>
+                        <a:srgbClr val="C9CFD8"/>
+                      </a:solidFill>
+                      <a:prstDash val="solid"/>
+                      <a:round/>
+                      <a:headEnd type="none" w="med" len="med"/>
+                      <a:tailEnd type="none" w="med" len="med"/>
+                    </a:lnL>
+                    <a:lnR w="9525" cap="flat" cmpd="sng" algn="ctr">
+                      <a:solidFill>
+                        <a:srgbClr val="C9CFD8"/>
+                      </a:solidFill>
+                      <a:prstDash val="solid"/>
+                      <a:round/>
+                      <a:headEnd type="none" w="med" len="med"/>
+                      <a:tailEnd type="none" w="med" len="med"/>
+                    </a:lnR>
+                    <a:lnT w="9525" cap="flat" cmpd="sng" algn="ctr">
+                      <a:solidFill>
+                        <a:srgbClr val="C9CFD8"/>
+                      </a:solidFill>
+                      <a:prstDash val="solid"/>
+                      <a:round/>
+                      <a:headEnd type="none" w="med" len="med"/>
+                      <a:tailEnd type="none" w="med" len="med"/>
+                    </a:lnT>
+                    <a:lnB w="9525" cap="flat" cmpd="sng" algn="ctr">
+                      <a:solidFill>
+                        <a:srgbClr val="C9CFD8"/>
+                      </a:solidFill>
+                      <a:prstDash val="solid"/>
+                      <a:round/>
+                      <a:headEnd type="none" w="med" len="med"/>
+                      <a:tailEnd type="none" w="med" len="med"/>
+                    </a:lnB>
+                  </a:tcPr>
+                </a:tc>
+              </a:tr>
+              <a:tr h="329184">
+                <a:tc>
+                  <a:txBody>
+                    <a:bodyPr/>
+                    <a:lstStyle/>
+                    <a:p>
+                      <a:pPr indent="0" marL="0">
+                        <a:buNone/>
+                      </a:pPr>
+                      <a:r>
+                        <a:rPr lang="en-US" sz="1000" dirty="0">
+                          <a:solidFill>
+                            <a:srgbClr val="4A5366"/>
+                          </a:solidFill>
+                        </a:rPr>
+                        <a:t>train loss</a:t>
+                      </a:r>
+                      <a:endParaRPr lang="en-US" sz="1000" dirty="0"/>
+                    </a:p>
+                  </a:txBody>
+                  <a:tcPr marL="91440" marR="91440" marT="45720" marB="45720" anchor="ctr">
+                    <a:lnL w="9525" cap="flat" cmpd="sng" algn="ctr">
+                      <a:solidFill>
+                        <a:srgbClr val="C9CFD8"/>
+                      </a:solidFill>
+                      <a:prstDash val="solid"/>
+                      <a:round/>
+                      <a:headEnd type="none" w="med" len="med"/>
+                      <a:tailEnd type="none" w="med" len="med"/>
+                    </a:lnL>
+                    <a:lnR w="9525" cap="flat" cmpd="sng" algn="ctr">
+                      <a:solidFill>
+                        <a:srgbClr val="C9CFD8"/>
+                      </a:solidFill>
+                      <a:prstDash val="solid"/>
+                      <a:round/>
+                      <a:headEnd type="none" w="med" len="med"/>
+                      <a:tailEnd type="none" w="med" len="med"/>
+                    </a:lnR>
+                    <a:lnT w="9525" cap="flat" cmpd="sng" algn="ctr">
+                      <a:solidFill>
+                        <a:srgbClr val="C9CFD8"/>
+                      </a:solidFill>
+                      <a:prstDash val="solid"/>
+                      <a:round/>
+                      <a:headEnd type="none" w="med" len="med"/>
+                      <a:tailEnd type="none" w="med" len="med"/>
+                    </a:lnT>
+                    <a:lnB w="9525" cap="flat" cmpd="sng" algn="ctr">
+                      <a:solidFill>
+                        <a:srgbClr val="C9CFD8"/>
+                      </a:solidFill>
+                      <a:prstDash val="solid"/>
+                      <a:round/>
+                      <a:headEnd type="none" w="med" len="med"/>
+                      <a:tailEnd type="none" w="med" len="med"/>
+                    </a:lnB>
+                  </a:tcPr>
+                </a:tc>
+                <a:tc>
+                  <a:txBody>
+                    <a:bodyPr/>
+                    <a:lstStyle/>
+                    <a:p>
+                      <a:pPr indent="0" marL="0">
+                        <a:buNone/>
+                      </a:pPr>
+                      <a:r>
+                        <a:rPr lang="en-US" sz="1000" dirty="0">
+                          <a:solidFill>
+                            <a:srgbClr val="4A5366"/>
+                          </a:solidFill>
+                        </a:rPr>
+                        <a:t>0.35</a:t>
+                      </a:r>
+                      <a:endParaRPr lang="en-US" sz="1000" dirty="0"/>
+                    </a:p>
+                  </a:txBody>
+                  <a:tcPr marL="91440" marR="91440" marT="45720" marB="45720" anchor="ctr">
+                    <a:lnL w="9525" cap="flat" cmpd="sng" algn="ctr">
+                      <a:solidFill>
+                        <a:srgbClr val="C9CFD8"/>
+                      </a:solidFill>
+                      <a:prstDash val="solid"/>
+                      <a:round/>
+                      <a:headEnd type="none" w="med" len="med"/>
+                      <a:tailEnd type="none" w="med" len="med"/>
+                    </a:lnL>
+                    <a:lnR w="9525" cap="flat" cmpd="sng" algn="ctr">
+                      <a:solidFill>
+                        <a:srgbClr val="C9CFD8"/>
+                      </a:solidFill>
+                      <a:prstDash val="solid"/>
+                      <a:round/>
+                      <a:headEnd type="none" w="med" len="med"/>
+                      <a:tailEnd type="none" w="med" len="med"/>
+                    </a:lnR>
+                    <a:lnT w="9525" cap="flat" cmpd="sng" algn="ctr">
+                      <a:solidFill>
+                        <a:srgbClr val="C9CFD8"/>
+                      </a:solidFill>
+                      <a:prstDash val="solid"/>
+                      <a:round/>
+                      <a:headEnd type="none" w="med" len="med"/>
+                      <a:tailEnd type="none" w="med" len="med"/>
+                    </a:lnT>
+                    <a:lnB w="9525" cap="flat" cmpd="sng" algn="ctr">
+                      <a:solidFill>
+                        <a:srgbClr val="C9CFD8"/>
+                      </a:solidFill>
+                      <a:prstDash val="solid"/>
+                      <a:round/>
+                      <a:headEnd type="none" w="med" len="med"/>
+                      <a:tailEnd type="none" w="med" len="med"/>
+                    </a:lnB>
+                  </a:tcPr>
+                </a:tc>
+                <a:tc>
+                  <a:txBody>
+                    <a:bodyPr/>
+                    <a:lstStyle/>
+                    <a:p>
+                      <a:pPr indent="0" marL="0">
+                        <a:buNone/>
+                      </a:pPr>
+                      <a:r>
+                        <a:rPr lang="en-US" sz="1000" dirty="0">
+                          <a:solidFill>
+                            <a:srgbClr val="4A5366"/>
+                          </a:solidFill>
+                        </a:rPr>
+                        <a:t>0.07</a:t>
+                      </a:r>
+                      <a:endParaRPr lang="en-US" sz="1000" dirty="0"/>
+                    </a:p>
+                  </a:txBody>
+                  <a:tcPr marL="91440" marR="91440" marT="45720" marB="45720" anchor="ctr">
+                    <a:lnL w="9525" cap="flat" cmpd="sng" algn="ctr">
+                      <a:solidFill>
+                        <a:srgbClr val="C9CFD8"/>
+                      </a:solidFill>
+                      <a:prstDash val="solid"/>
+                      <a:round/>
+                      <a:headEnd type="none" w="med" len="med"/>
+                      <a:tailEnd type="none" w="med" len="med"/>
+                    </a:lnL>
+                    <a:lnR w="9525" cap="flat" cmpd="sng" algn="ctr">
+                      <a:solidFill>
+                        <a:srgbClr val="C9CFD8"/>
+                      </a:solidFill>
+                      <a:prstDash val="solid"/>
+                      <a:round/>
+                      <a:headEnd type="none" w="med" len="med"/>
+                      <a:tailEnd type="none" w="med" len="med"/>
+                    </a:lnR>
+                    <a:lnT w="9525" cap="flat" cmpd="sng" algn="ctr">
+                      <a:solidFill>
+                        <a:srgbClr val="C9CFD8"/>
+                      </a:solidFill>
+                      <a:prstDash val="solid"/>
+                      <a:round/>
+                      <a:headEnd type="none" w="med" len="med"/>
+                      <a:tailEnd type="none" w="med" len="med"/>
+                    </a:lnT>
+                    <a:lnB w="9525" cap="flat" cmpd="sng" algn="ctr">
+                      <a:solidFill>
+                        <a:srgbClr val="C9CFD8"/>
+                      </a:solidFill>
+                      <a:prstDash val="solid"/>
+                      <a:round/>
+                      <a:headEnd type="none" w="med" len="med"/>
+                      <a:tailEnd type="none" w="med" len="med"/>
+                    </a:lnB>
+                  </a:tcPr>
+                </a:tc>
+              </a:tr>
+              <a:tr h="329184">
+                <a:tc>
+                  <a:txBody>
+                    <a:bodyPr/>
+                    <a:lstStyle/>
+                    <a:p>
+                      <a:pPr indent="0" marL="0">
+                        <a:buNone/>
+                      </a:pPr>
+                      <a:r>
+                        <a:rPr lang="en-US" sz="1000" dirty="0">
+                          <a:solidFill>
+                            <a:srgbClr val="4A5366"/>
+                          </a:solidFill>
+                        </a:rPr>
+                        <a:t>val loss</a:t>
+                      </a:r>
+                      <a:endParaRPr lang="en-US" sz="1000" dirty="0"/>
+                    </a:p>
+                  </a:txBody>
+                  <a:tcPr marL="91440" marR="91440" marT="45720" marB="45720" anchor="ctr">
+                    <a:lnL w="9525" cap="flat" cmpd="sng" algn="ctr">
+                      <a:solidFill>
+                        <a:srgbClr val="C9CFD8"/>
+                      </a:solidFill>
+                      <a:prstDash val="solid"/>
+                      <a:round/>
+                      <a:headEnd type="none" w="med" len="med"/>
+                      <a:tailEnd type="none" w="med" len="med"/>
+                    </a:lnL>
+                    <a:lnR w="9525" cap="flat" cmpd="sng" algn="ctr">
+                      <a:solidFill>
+                        <a:srgbClr val="C9CFD8"/>
+                      </a:solidFill>
+                      <a:prstDash val="solid"/>
+                      <a:round/>
+                      <a:headEnd type="none" w="med" len="med"/>
+                      <a:tailEnd type="none" w="med" len="med"/>
+                    </a:lnR>
+                    <a:lnT w="9525" cap="flat" cmpd="sng" algn="ctr">
+                      <a:solidFill>
+                        <a:srgbClr val="C9CFD8"/>
+                      </a:solidFill>
+                      <a:prstDash val="solid"/>
+                      <a:round/>
+                      <a:headEnd type="none" w="med" len="med"/>
+                      <a:tailEnd type="none" w="med" len="med"/>
+                    </a:lnT>
+                    <a:lnB w="9525" cap="flat" cmpd="sng" algn="ctr">
+                      <a:solidFill>
+                        <a:srgbClr val="C9CFD8"/>
+                      </a:solidFill>
+                      <a:prstDash val="solid"/>
+                      <a:round/>
+                      <a:headEnd type="none" w="med" len="med"/>
+                      <a:tailEnd type="none" w="med" len="med"/>
+                    </a:lnB>
+                  </a:tcPr>
+                </a:tc>
+                <a:tc>
+                  <a:txBody>
+                    <a:bodyPr/>
+                    <a:lstStyle/>
+                    <a:p>
+                      <a:pPr indent="0" marL="0">
+                        <a:buNone/>
+                      </a:pPr>
+                      <a:r>
+                        <a:rPr lang="en-US" sz="1000" dirty="0">
+                          <a:solidFill>
+                            <a:srgbClr val="4A5366"/>
+                          </a:solidFill>
+                        </a:rPr>
+                        <a:t>0.66 (계속 감소)</a:t>
+                      </a:r>
+                      <a:endParaRPr lang="en-US" sz="1000" dirty="0"/>
+                    </a:p>
+                  </a:txBody>
+                  <a:tcPr marL="91440" marR="91440" marT="45720" marB="45720" anchor="ctr">
+                    <a:lnL w="9525" cap="flat" cmpd="sng" algn="ctr">
+                      <a:solidFill>
+                        <a:srgbClr val="C9CFD8"/>
+                      </a:solidFill>
+                      <a:prstDash val="solid"/>
+                      <a:round/>
+                      <a:headEnd type="none" w="med" len="med"/>
+                      <a:tailEnd type="none" w="med" len="med"/>
+                    </a:lnL>
+                    <a:lnR w="9525" cap="flat" cmpd="sng" algn="ctr">
+                      <a:solidFill>
+                        <a:srgbClr val="C9CFD8"/>
+                      </a:solidFill>
+                      <a:prstDash val="solid"/>
+                      <a:round/>
+                      <a:headEnd type="none" w="med" len="med"/>
+                      <a:tailEnd type="none" w="med" len="med"/>
+                    </a:lnR>
+                    <a:lnT w="9525" cap="flat" cmpd="sng" algn="ctr">
+                      <a:solidFill>
+                        <a:srgbClr val="C9CFD8"/>
+                      </a:solidFill>
+                      <a:prstDash val="solid"/>
+                      <a:round/>
+                      <a:headEnd type="none" w="med" len="med"/>
+                      <a:tailEnd type="none" w="med" len="med"/>
+                    </a:lnT>
+                    <a:lnB w="9525" cap="flat" cmpd="sng" algn="ctr">
+                      <a:solidFill>
+                        <a:srgbClr val="C9CFD8"/>
+                      </a:solidFill>
+                      <a:prstDash val="solid"/>
+                      <a:round/>
+                      <a:headEnd type="none" w="med" len="med"/>
+                      <a:tailEnd type="none" w="med" len="med"/>
+                    </a:lnB>
+                  </a:tcPr>
+                </a:tc>
+                <a:tc>
+                  <a:txBody>
+                    <a:bodyPr/>
+                    <a:lstStyle/>
+                    <a:p>
+                      <a:pPr indent="0" marL="0">
+                        <a:buNone/>
+                      </a:pPr>
+                      <a:r>
+                        <a:rPr lang="en-US" sz="1000" dirty="0">
+                          <a:solidFill>
+                            <a:srgbClr val="4A5366"/>
+                          </a:solidFill>
+                        </a:rPr>
+                        <a:t>0.49 (최저 0.45)</a:t>
+                      </a:r>
+                      <a:endParaRPr lang="en-US" sz="1000" dirty="0"/>
+                    </a:p>
+                  </a:txBody>
+                  <a:tcPr marL="91440" marR="91440" marT="45720" marB="45720" anchor="ctr">
+                    <a:lnL w="9525" cap="flat" cmpd="sng" algn="ctr">
+                      <a:solidFill>
+                        <a:srgbClr val="C9CFD8"/>
+                      </a:solidFill>
+                      <a:prstDash val="solid"/>
+                      <a:round/>
+                      <a:headEnd type="none" w="med" len="med"/>
+                      <a:tailEnd type="none" w="med" len="med"/>
+                    </a:lnL>
+                    <a:lnR w="9525" cap="flat" cmpd="sng" algn="ctr">
+                      <a:solidFill>
+                        <a:srgbClr val="C9CFD8"/>
+                      </a:solidFill>
+                      <a:prstDash val="solid"/>
+                      <a:round/>
+                      <a:headEnd type="none" w="med" len="med"/>
+                      <a:tailEnd type="none" w="med" len="med"/>
+                    </a:lnR>
+                    <a:lnT w="9525" cap="flat" cmpd="sng" algn="ctr">
+                      <a:solidFill>
+                        <a:srgbClr val="C9CFD8"/>
+                      </a:solidFill>
+                      <a:prstDash val="solid"/>
+                      <a:round/>
+                      <a:headEnd type="none" w="med" len="med"/>
+                      <a:tailEnd type="none" w="med" len="med"/>
+                    </a:lnT>
+                    <a:lnB w="9525" cap="flat" cmpd="sng" algn="ctr">
+                      <a:solidFill>
+                        <a:srgbClr val="C9CFD8"/>
+                      </a:solidFill>
+                      <a:prstDash val="solid"/>
+                      <a:round/>
+                      <a:headEnd type="none" w="med" len="med"/>
+                      <a:tailEnd type="none" w="med" len="med"/>
+                    </a:lnB>
+                  </a:tcPr>
+                </a:tc>
+              </a:tr>
+            </a:tbl>
+          </a:graphicData>
+        </a:graphic>
+      </p:graphicFrame>
+      <p:pic>
+        <p:nvPicPr>
+          <p:cNvPr id="18" name="loss-pickup" descr="오란다 학습 손실(왼쪽)과 검증 손실(오른쪽) 그래프: 둘 다 끝까지 내려간다">    </p:cNvPr>
+          <p:cNvPicPr>
+            <a:picLocks noChangeAspect="1"/>
+          </p:cNvPicPr>
+          <p:nvPr/>
+        </p:nvPicPr>
+        <p:blipFill>
+          <a:blip r:embed="rId2"/>
+          <a:stretch>
+            <a:fillRect/>
+          </a:stretch>
+        </p:blipFill>
+        <p:spPr>
+          <a:xfrm>
+            <a:off x="6812280" y="2103120"/>
+            <a:ext cx="1874520" cy="585216"/>
+          </a:xfrm>
+          <a:prstGeom prst="rect">
+            <a:avLst/>
+          </a:prstGeom>
+        </p:spPr>
+      </p:pic>
+      <p:sp>
+        <p:nvSpPr>
+          <p:cNvPr id="19" name="Text 14"/>
+          <p:cNvSpPr txBox="1"/>
+          <p:nvPr/>
+        </p:nvSpPr>
+        <p:spPr>
+          <a:xfrm>
+            <a:off x="6812280" y="2706624"/>
+            <a:ext cx="1874520" cy="201168"/>
+          </a:xfrm>
+          <a:prstGeom prst="rect">
+            <a:avLst/>
+          </a:prstGeom>
+          <a:noFill/>
+          <a:ln/>
+        </p:spPr>
+        <p:txBody>
+          <a:bodyPr wrap="square" lIns="0" tIns="0" rIns="0" bIns="0" rtlCol="0" anchor="ctr"/>
+          <a:lstStyle/>
+          <a:p>
+            <a:pPr indent="0" marL="0">
+              <a:buNone/>
+            </a:pPr>
+            <a:r>
+              <a:rPr lang="en-US" sz="900" dirty="0">
+                <a:solidFill>
+                  <a:srgbClr val="7A8394"/>
+                </a:solidFill>
+              </a:rPr>
+              <a:t>오란다: 학습 · 검증 손실</a:t>
+            </a:r>
+            <a:endParaRPr lang="en-US" sz="900" dirty="0"/>
+          </a:p>
+        </p:txBody>
+      </p:sp>
+      <p:pic>
+        <p:nvPicPr>
+          <p:cNvPr id="20" name="loss-dori" descr="도리도리 학습 손실과 검증 손실 그래프">    </p:cNvPr>
+          <p:cNvPicPr>
+            <a:picLocks noChangeAspect="1"/>
+          </p:cNvPicPr>
+          <p:nvPr/>
+        </p:nvPicPr>
+        <p:blipFill>
+          <a:blip r:embed="rId3"/>
+          <a:stretch>
+            <a:fillRect/>
+          </a:stretch>
+        </p:blipFill>
+        <p:spPr>
+          <a:xfrm>
+            <a:off x="6812280" y="2971800"/>
+            <a:ext cx="1874520" cy="603504"/>
+          </a:xfrm>
+          <a:prstGeom prst="rect">
+            <a:avLst/>
+          </a:prstGeom>
+        </p:spPr>
+      </p:pic>
+      <p:sp>
+        <p:nvSpPr>
+          <p:cNvPr id="21" name="Text 15"/>
+          <p:cNvSpPr txBox="1"/>
+          <p:nvPr/>
+        </p:nvSpPr>
+        <p:spPr>
+          <a:xfrm>
+            <a:off x="6812280" y="3593592"/>
+            <a:ext cx="1874520" cy="201168"/>
+          </a:xfrm>
+          <a:prstGeom prst="rect">
+            <a:avLst/>
+          </a:prstGeom>
+          <a:noFill/>
+          <a:ln/>
+        </p:spPr>
+        <p:txBody>
+          <a:bodyPr wrap="square" lIns="0" tIns="0" rIns="0" bIns="0" rtlCol="0" anchor="ctr"/>
+          <a:lstStyle/>
+          <a:p>
+            <a:pPr indent="0" marL="0">
+              <a:buNone/>
+            </a:pPr>
+            <a:r>
+              <a:rPr lang="en-US" sz="900" dirty="0">
+                <a:solidFill>
+                  <a:srgbClr val="7A8394"/>
+                </a:solidFill>
+              </a:rPr>
+              <a:t>도리도리: 학습 · 검증 손실</a:t>
+            </a:r>
+            <a:endParaRPr lang="en-US" sz="900" dirty="0"/>
+          </a:p>
+        </p:txBody>
+      </p:sp>
+      <p:sp>
+        <p:nvSpPr>
+          <p:cNvPr id="22" name="Text 16"/>
+          <p:cNvSpPr txBox="1"/>
+          <p:nvPr/>
+        </p:nvSpPr>
+        <p:spPr>
+          <a:xfrm>
+            <a:off x="3017520" y="3794760"/>
+            <a:ext cx="3657600" cy="201168"/>
+          </a:xfrm>
+          <a:prstGeom prst="rect">
+            <a:avLst/>
+          </a:prstGeom>
+          <a:noFill/>
+          <a:ln/>
+        </p:spPr>
+        <p:txBody>
+          <a:bodyPr wrap="square" lIns="0" tIns="0" rIns="0" bIns="0" rtlCol="0" anchor="ctr"/>
+          <a:lstStyle/>
+          <a:p>
+            <a:pPr indent="0" marL="0">
+              <a:buNone/>
+            </a:pPr>
+            <a:r>
+              <a:rPr lang="en-US" sz="900" dirty="0">
+                <a:solidFill>
+                  <a:srgbClr val="7A8394"/>
+                </a:solidFill>
+              </a:rPr>
+              <a:t>* 학습 단계 수 × 배치로 추정</a:t>
+            </a:r>
+            <a:endParaRPr lang="en-US" sz="900" dirty="0"/>
+          </a:p>
+        </p:txBody>
+      </p:sp>
+      <p:sp>
+        <p:nvSpPr>
+          <p:cNvPr id="23" name="card-149"/>
+          <p:cNvSpPr/>
+          <p:nvPr/>
+        </p:nvSpPr>
+        <p:spPr>
+          <a:xfrm>
+            <a:off x="3017520" y="4069080"/>
+            <a:ext cx="5669280" cy="685800"/>
           </a:xfrm>
           <a:prstGeom prst="roundRect">
             <a:avLst>
-              <a:gd name="adj" fmla="val 2963"/>
+              <a:gd name="adj" fmla="val 10667"/>
             </a:avLst>
           </a:prstGeom>
           <a:solidFill>
@@ -9295,437 +11139,14 @@
       </p:sp>
       <p:sp>
         <p:nvSpPr>
-          <p:cNvPr id="16" name="Text 14"/>
+          <p:cNvPr id="24" name="cardtext-150"/>
           <p:cNvSpPr txBox="1"/>
           <p:nvPr/>
         </p:nvSpPr>
         <p:spPr>
           <a:xfrm>
-            <a:off x="594360" y="2377440"/>
-            <a:ext cx="3840480" cy="320040"/>
-          </a:xfrm>
-          <a:prstGeom prst="rect">
-            <a:avLst/>
-          </a:prstGeom>
-          <a:noFill/>
-          <a:ln/>
-        </p:spPr>
-        <p:txBody>
-          <a:bodyPr wrap="square" lIns="0" tIns="0" rIns="0" bIns="0" rtlCol="0" anchor="ctr"/>
-          <a:lstStyle/>
-          <a:p>
-            <a:pPr indent="0" marL="0">
-              <a:buNone/>
-            </a:pPr>
-            <a:r>
-              <a:rPr lang="en-US" sz="1400" b="1" dirty="0">
-                <a:solidFill>
-                  <a:srgbClr val="1D2330"/>
-                </a:solidFill>
-              </a:rPr>
-              <a:t>놓는 순간을 그리퍼 값으로 감지 (실측)</a:t>
-            </a:r>
-            <a:endParaRPr lang="en-US" sz="1400" dirty="0"/>
-          </a:p>
-        </p:txBody>
-      </p:sp>
-      <p:sp>
-        <p:nvSpPr>
-          <p:cNvPr id="17" name="grip-axis"/>
-          <p:cNvSpPr/>
-          <p:nvPr/>
-        </p:nvSpPr>
-        <p:spPr>
-          <a:xfrm>
-            <a:off x="685800" y="3246120"/>
-            <a:ext cx="3657600" cy="0"/>
-          </a:xfrm>
-          <a:prstGeom prst="line">
-            <a:avLst/>
-          </a:prstGeom>
-          <a:noFill/>
-          <a:ln w="19050">
-            <a:solidFill>
-              <a:srgbClr val="7A8394"/>
-            </a:solidFill>
-            <a:prstDash val="solid"/>
-          </a:ln>
-        </p:spPr>
-      </p:sp>
-      <p:sp>
-        <p:nvSpPr>
-          <p:cNvPr id="18" name="grip-empty"/>
-          <p:cNvSpPr/>
-          <p:nvPr/>
-        </p:nvSpPr>
-        <p:spPr>
-          <a:xfrm>
-            <a:off x="1490472" y="3136392"/>
-            <a:ext cx="128016" cy="219456"/>
-          </a:xfrm>
-          <a:prstGeom prst="rect">
-            <a:avLst/>
-          </a:prstGeom>
-          <a:solidFill>
-            <a:srgbClr val="F3F5F8"/>
-          </a:solidFill>
-          <a:ln w="12700">
-            <a:solidFill>
-              <a:srgbClr val="C9CFD8"/>
-            </a:solidFill>
-            <a:prstDash val="solid"/>
-          </a:ln>
-        </p:spPr>
-      </p:sp>
-      <p:sp>
-        <p:nvSpPr>
-          <p:cNvPr id="19" name="grip-hold"/>
-          <p:cNvSpPr/>
-          <p:nvPr/>
-        </p:nvSpPr>
-        <p:spPr>
-          <a:xfrm>
-            <a:off x="2368296" y="3136392"/>
-            <a:ext cx="219456" cy="219456"/>
-          </a:xfrm>
-          <a:prstGeom prst="rect">
-            <a:avLst/>
-          </a:prstGeom>
-          <a:solidFill>
-            <a:srgbClr val="FBE9D2"/>
-          </a:solidFill>
-          <a:ln w="12700">
-            <a:solidFill>
-              <a:srgbClr val="C8691A"/>
-            </a:solidFill>
-            <a:prstDash val="solid"/>
-          </a:ln>
-        </p:spPr>
-      </p:sp>
-      <p:sp>
-        <p:nvSpPr>
-          <p:cNvPr id="20" name="grip-open"/>
-          <p:cNvSpPr/>
-          <p:nvPr/>
-        </p:nvSpPr>
-        <p:spPr>
-          <a:xfrm>
-            <a:off x="2880360" y="3136392"/>
-            <a:ext cx="1417320" cy="219456"/>
-          </a:xfrm>
-          <a:prstGeom prst="rect">
-            <a:avLst/>
-          </a:prstGeom>
-          <a:solidFill>
-            <a:srgbClr val="DFF3E7"/>
-          </a:solidFill>
-          <a:ln w="12700">
-            <a:solidFill>
-              <a:srgbClr val="1B7F4B"/>
-            </a:solidFill>
-            <a:prstDash val="solid"/>
-          </a:ln>
-        </p:spPr>
-      </p:sp>
-      <p:sp>
-        <p:nvSpPr>
-          <p:cNvPr id="21" name="grip-closed-line"/>
-          <p:cNvSpPr/>
-          <p:nvPr/>
-        </p:nvSpPr>
-        <p:spPr>
-          <a:xfrm>
-            <a:off x="2697480" y="3017520"/>
-            <a:ext cx="0" cy="457200"/>
-          </a:xfrm>
-          <a:prstGeom prst="line">
-            <a:avLst/>
-          </a:prstGeom>
-          <a:noFill/>
-          <a:ln w="25400">
-            <a:solidFill>
-              <a:srgbClr val="2F5BD8"/>
-            </a:solidFill>
-            <a:prstDash val="solid"/>
-          </a:ln>
-        </p:spPr>
-      </p:sp>
-      <p:sp>
-        <p:nvSpPr>
-          <p:cNvPr id="22" name="grip-open-line"/>
-          <p:cNvSpPr/>
-          <p:nvPr/>
-        </p:nvSpPr>
-        <p:spPr>
-          <a:xfrm>
-            <a:off x="2788920" y="3017520"/>
-            <a:ext cx="0" cy="457200"/>
-          </a:xfrm>
-          <a:prstGeom prst="line">
-            <a:avLst/>
-          </a:prstGeom>
-          <a:noFill/>
-          <a:ln w="25400">
-            <a:solidFill>
-              <a:srgbClr val="B3261E"/>
-            </a:solidFill>
-            <a:prstDash val="solid"/>
-          </a:ln>
-        </p:spPr>
-      </p:sp>
-      <p:sp>
-        <p:nvSpPr>
-          <p:cNvPr id="23" name="glab-149"/>
-          <p:cNvSpPr txBox="1"/>
-          <p:nvPr/>
-        </p:nvSpPr>
-        <p:spPr>
-          <a:xfrm>
-            <a:off x="1088136" y="2834640"/>
-            <a:ext cx="914400" cy="228600"/>
-          </a:xfrm>
-          <a:prstGeom prst="rect">
-            <a:avLst/>
-          </a:prstGeom>
-          <a:noFill/>
-          <a:ln/>
-        </p:spPr>
-        <p:txBody>
-          <a:bodyPr wrap="square" lIns="0" tIns="0" rIns="0" bIns="0" rtlCol="0" anchor="ctr"/>
-          <a:lstStyle/>
-          <a:p>
-            <a:pPr algn="ctr" indent="0" marL="0">
-              <a:buNone/>
-            </a:pPr>
-            <a:r>
-              <a:rPr lang="en-US" sz="1000" dirty="0">
-                <a:solidFill>
-                  <a:srgbClr val="4A5366"/>
-                </a:solidFill>
-              </a:rPr>
-              <a:t>빈손 49~50</a:t>
-            </a:r>
-            <a:endParaRPr lang="en-US" sz="1000" dirty="0"/>
-          </a:p>
-        </p:txBody>
-      </p:sp>
-      <p:sp>
-        <p:nvSpPr>
-          <p:cNvPr id="24" name="glab-150"/>
-          <p:cNvSpPr txBox="1"/>
-          <p:nvPr/>
-        </p:nvSpPr>
-        <p:spPr>
-          <a:xfrm>
-            <a:off x="2286000" y="2834640"/>
-            <a:ext cx="822960" cy="228600"/>
-          </a:xfrm>
-          <a:prstGeom prst="rect">
-            <a:avLst/>
-          </a:prstGeom>
-          <a:noFill/>
-          <a:ln/>
-        </p:spPr>
-        <p:txBody>
-          <a:bodyPr wrap="square" lIns="0" tIns="0" rIns="0" bIns="0" rtlCol="0" anchor="ctr"/>
-          <a:lstStyle/>
-          <a:p>
-            <a:pPr algn="ctr" indent="0" marL="0">
-              <a:buNone/>
-            </a:pPr>
-            <a:r>
-              <a:rPr lang="en-US" sz="1000" dirty="0">
-                <a:solidFill>
-                  <a:srgbClr val="4A5366"/>
-                </a:solidFill>
-              </a:rPr>
-              <a:t>닫힘 &lt;56</a:t>
-            </a:r>
-            <a:endParaRPr lang="en-US" sz="1000" dirty="0"/>
-          </a:p>
-        </p:txBody>
-      </p:sp>
-      <p:sp>
-        <p:nvSpPr>
-          <p:cNvPr id="25" name="glab-151"/>
-          <p:cNvSpPr txBox="1"/>
-          <p:nvPr/>
-        </p:nvSpPr>
-        <p:spPr>
-          <a:xfrm>
-            <a:off x="3337560" y="2834640"/>
-            <a:ext cx="914400" cy="228600"/>
-          </a:xfrm>
-          <a:prstGeom prst="rect">
-            <a:avLst/>
-          </a:prstGeom>
-          <a:noFill/>
-          <a:ln/>
-        </p:spPr>
-        <p:txBody>
-          <a:bodyPr wrap="square" lIns="0" tIns="0" rIns="0" bIns="0" rtlCol="0" anchor="ctr"/>
-          <a:lstStyle/>
-          <a:p>
-            <a:pPr algn="ctr" indent="0" marL="0">
-              <a:buNone/>
-            </a:pPr>
-            <a:r>
-              <a:rPr lang="en-US" sz="1000" dirty="0">
-                <a:solidFill>
-                  <a:srgbClr val="4A5366"/>
-                </a:solidFill>
-              </a:rPr>
-              <a:t>벌림 ~79</a:t>
-            </a:r>
-            <a:endParaRPr lang="en-US" sz="1000" dirty="0"/>
-          </a:p>
-        </p:txBody>
-      </p:sp>
-      <p:sp>
-        <p:nvSpPr>
-          <p:cNvPr id="26" name="glab-152"/>
-          <p:cNvSpPr txBox="1"/>
-          <p:nvPr/>
-        </p:nvSpPr>
-        <p:spPr>
-          <a:xfrm>
-            <a:off x="1563624" y="3429000"/>
-            <a:ext cx="868680" cy="228600"/>
-          </a:xfrm>
-          <a:prstGeom prst="rect">
-            <a:avLst/>
-          </a:prstGeom>
-          <a:noFill/>
-          <a:ln/>
-        </p:spPr>
-        <p:txBody>
-          <a:bodyPr wrap="square" lIns="0" tIns="0" rIns="0" bIns="0" rtlCol="0" anchor="ctr"/>
-          <a:lstStyle/>
-          <a:p>
-            <a:pPr algn="r" indent="0" marL="0">
-              <a:buNone/>
-            </a:pPr>
-            <a:r>
-              <a:rPr lang="en-US" sz="1000" dirty="0">
-                <a:solidFill>
-                  <a:srgbClr val="4A5366"/>
-                </a:solidFill>
-              </a:rPr>
-              <a:t>쥠 54~55</a:t>
-            </a:r>
-            <a:endParaRPr lang="en-US" sz="1000" dirty="0"/>
-          </a:p>
-        </p:txBody>
-      </p:sp>
-      <p:sp>
-        <p:nvSpPr>
-          <p:cNvPr id="27" name="glab-153"/>
-          <p:cNvSpPr txBox="1"/>
-          <p:nvPr/>
-        </p:nvSpPr>
-        <p:spPr>
-          <a:xfrm>
-            <a:off x="2834640" y="3429000"/>
-            <a:ext cx="1463040" cy="228600"/>
-          </a:xfrm>
-          <a:prstGeom prst="rect">
-            <a:avLst/>
-          </a:prstGeom>
-          <a:noFill/>
-          <a:ln/>
-        </p:spPr>
-        <p:txBody>
-          <a:bodyPr wrap="square" lIns="0" tIns="0" rIns="0" bIns="0" rtlCol="0" anchor="ctr"/>
-          <a:lstStyle/>
-          <a:p>
-            <a:pPr algn="l" indent="0" marL="0">
-              <a:buNone/>
-            </a:pPr>
-            <a:r>
-              <a:rPr lang="en-US" sz="1000" dirty="0">
-                <a:solidFill>
-                  <a:srgbClr val="4A5366"/>
-                </a:solidFill>
-              </a:rPr>
-              <a:t>열림 &gt;56.5 (0.15초)</a:t>
-            </a:r>
-            <a:endParaRPr lang="en-US" sz="1000" dirty="0"/>
-          </a:p>
-        </p:txBody>
-      </p:sp>
-      <p:sp>
-        <p:nvSpPr>
-          <p:cNvPr id="28" name="Text 26"/>
-          <p:cNvSpPr txBox="1"/>
-          <p:nvPr/>
-        </p:nvSpPr>
-        <p:spPr>
-          <a:xfrm>
-            <a:off x="594360" y="3840480"/>
-            <a:ext cx="3840480" cy="822960"/>
-          </a:xfrm>
-          <a:prstGeom prst="rect">
-            <a:avLst/>
-          </a:prstGeom>
-          <a:noFill/>
-          <a:ln/>
-        </p:spPr>
-        <p:txBody>
-          <a:bodyPr wrap="square" lIns="0" tIns="0" rIns="0" bIns="0" rtlCol="0" anchor="ctr"/>
-          <a:lstStyle/>
-          <a:p>
-            <a:pPr indent="0" marL="0">
-              <a:buNone/>
-            </a:pPr>
-            <a:r>
-              <a:rPr lang="en-US" sz="1100" dirty="0">
-                <a:solidFill>
-                  <a:srgbClr val="4A5366"/>
-                </a:solidFill>
-              </a:rPr>
-              <a:t>닫힘 → 열림이면 ACT 멈춤 → 코드가 lift → home. 녹화 31개 시뮬레이션: 23개가 놓는 순간 정지, 조기 정지 0</a:t>
-            </a:r>
-            <a:endParaRPr lang="en-US" sz="1100" dirty="0"/>
-          </a:p>
-        </p:txBody>
-      </p:sp>
-      <p:sp>
-        <p:nvSpPr>
-          <p:cNvPr id="29" name="card-154"/>
-          <p:cNvSpPr/>
-          <p:nvPr/>
-        </p:nvSpPr>
-        <p:spPr>
-          <a:xfrm>
-            <a:off x="4846320" y="2286000"/>
-            <a:ext cx="3840480" cy="1143000"/>
-          </a:xfrm>
-          <a:prstGeom prst="roundRect">
-            <a:avLst>
-              <a:gd name="adj" fmla="val 6400"/>
-            </a:avLst>
-          </a:prstGeom>
-          <a:solidFill>
-            <a:srgbClr val="F3F5F8"/>
-          </a:solidFill>
-          <a:ln w="12700">
-            <a:solidFill>
-              <a:srgbClr val="C9CFD8"/>
-            </a:solidFill>
-            <a:prstDash val="solid"/>
-          </a:ln>
-        </p:spPr>
-      </p:sp>
-      <p:sp>
-        <p:nvSpPr>
-          <p:cNvPr id="30" name="cardtext-155"/>
-          <p:cNvSpPr txBox="1"/>
-          <p:nvPr/>
-        </p:nvSpPr>
-        <p:spPr>
-          <a:xfrm>
-            <a:off x="4956048" y="2359152"/>
-            <a:ext cx="3621024" cy="996696"/>
+            <a:off x="3127248" y="4142232"/>
+            <a:ext cx="5449824" cy="539496"/>
           </a:xfrm>
           <a:prstGeom prst="rect">
             <a:avLst/>
@@ -9744,152 +11165,31 @@
               <a:buNone/>
             </a:pPr>
             <a:r>
-              <a:rPr lang="en-US" sz="1400" b="1" dirty="0">
+              <a:rPr lang="en-US" sz="1200" b="1" dirty="0">
                 <a:solidFill>
                   <a:srgbClr val="1D2330"/>
                 </a:solidFill>
               </a:rPr>
-              <a:t>정책 입력 · 출력</a:t>
-            </a:r>
-            <a:endParaRPr lang="en-US" sz="1400" dirty="0"/>
-          </a:p>
-          <a:p>
-            <a:pPr marL="342900" indent="-342900">
+              <a:t>데이터가 말해 준 것</a:t>
+            </a:r>
+            <a:endParaRPr lang="en-US" sz="1200" dirty="0"/>
+          </a:p>
+          <a:p>
+            <a:pPr indent="0" marL="0">
               <a:spcAft>
                 <a:spcPts val="300"/>
               </a:spcAft>
-              <a:buSzPct val="100000"/>
-              <a:buChar char="•"/>
-            </a:pPr>
-            <a:r>
-              <a:rPr lang="en-US" sz="1200" dirty="0">
+              <a:buNone/>
+            </a:pPr>
+            <a:r>
+              <a:rPr lang="en-US" sz="1100" dirty="0">
                 <a:solidFill>
                   <a:srgbClr val="4A5366"/>
                 </a:solidFill>
               </a:rPr>
-              <a:t>관절 6개 + 카메라 3대, 384×384 레터박스</a:t>
-            </a:r>
-            <a:endParaRPr lang="en-US" sz="1400" dirty="0"/>
-          </a:p>
-          <a:p>
-            <a:pPr marL="342900" indent="-342900">
-              <a:spcAft>
-                <a:spcPts val="300"/>
-              </a:spcAft>
-              <a:buSzPct val="100000"/>
-              <a:buChar char="•"/>
-            </a:pPr>
-            <a:r>
-              <a:rPr lang="en-US" sz="1200" dirty="0">
-                <a:solidFill>
-                  <a:srgbClr val="4A5366"/>
-                </a:solidFill>
-              </a:rPr>
-              <a:t>출력 100스텝 관절 목표 (약 3.3초 분량)</a:t>
-            </a:r>
-            <a:endParaRPr lang="en-US" sz="1400" dirty="0"/>
-          </a:p>
-        </p:txBody>
-      </p:sp>
-      <p:sp>
-        <p:nvSpPr>
-          <p:cNvPr id="31" name="card-156"/>
-          <p:cNvSpPr/>
-          <p:nvPr/>
-        </p:nvSpPr>
-        <p:spPr>
-          <a:xfrm>
-            <a:off x="4846320" y="3611880"/>
-            <a:ext cx="3840480" cy="1143000"/>
-          </a:xfrm>
-          <a:prstGeom prst="roundRect">
-            <a:avLst>
-              <a:gd name="adj" fmla="val 6400"/>
-            </a:avLst>
-          </a:prstGeom>
-          <a:solidFill>
-            <a:srgbClr val="F3F5F8"/>
-          </a:solidFill>
-          <a:ln w="12700">
-            <a:solidFill>
-              <a:srgbClr val="C9CFD8"/>
-            </a:solidFill>
-            <a:prstDash val="solid"/>
-          </a:ln>
-        </p:spPr>
-      </p:sp>
-      <p:sp>
-        <p:nvSpPr>
-          <p:cNvPr id="32" name="cardtext-157"/>
-          <p:cNvSpPr txBox="1"/>
-          <p:nvPr/>
-        </p:nvSpPr>
-        <p:spPr>
-          <a:xfrm>
-            <a:off x="4956048" y="3685032"/>
-            <a:ext cx="3621024" cy="996696"/>
-          </a:xfrm>
-          <a:prstGeom prst="rect">
-            <a:avLst/>
-          </a:prstGeom>
-          <a:noFill/>
-          <a:ln/>
-        </p:spPr>
-        <p:txBody>
-          <a:bodyPr wrap="square" lIns="0" tIns="0" rIns="0" bIns="0" rtlCol="0" anchor="t"/>
-          <a:lstStyle/>
-          <a:p>
-            <a:pPr indent="0" marL="0">
-              <a:spcAft>
-                <a:spcPts val="400"/>
-              </a:spcAft>
-              <a:buNone/>
-            </a:pPr>
-            <a:r>
-              <a:rPr lang="en-US" sz="1400" b="1" dirty="0">
-                <a:solidFill>
-                  <a:srgbClr val="1D2330"/>
-                </a:solidFill>
-              </a:rPr>
-              <a:t>도리도리</a:t>
-            </a:r>
-            <a:endParaRPr lang="en-US" sz="1400" dirty="0"/>
-          </a:p>
-          <a:p>
-            <a:pPr marL="342900" indent="-342900">
-              <a:spcAft>
-                <a:spcPts val="300"/>
-              </a:spcAft>
-              <a:buSzPct val="100000"/>
-              <a:buChar char="•"/>
-            </a:pPr>
-            <a:r>
-              <a:rPr lang="en-US" sz="1200" dirty="0">
-                <a:solidFill>
-                  <a:srgbClr val="4A5366"/>
-                </a:solidFill>
-              </a:rPr>
-              <a:t>학습 모델은 실기에서 몸통을 ±1만 움직임</a:t>
-            </a:r>
-            <a:endParaRPr lang="en-US" sz="1400" dirty="0"/>
-          </a:p>
-          <a:p>
-            <a:pPr marL="342900" indent="-342900">
-              <a:spcAft>
-                <a:spcPts val="300"/>
-              </a:spcAft>
-              <a:buSzPct val="100000"/>
-              <a:buChar char="•"/>
-            </a:pPr>
-            <a:r>
-              <a:rPr lang="en-US" sz="1200" dirty="0">
-                <a:solidFill>
-                  <a:srgbClr val="4A5366"/>
-                </a:solidFill>
-              </a:rPr>
-              <a:t>거부 · 채팅은 코드 도리도리, 버튼으로 모델도 시험</a:t>
-            </a:r>
-            <a:endParaRPr lang="en-US" sz="1400" dirty="0"/>
+              <a:t>오란다는 덜 학습(검증 손실이 아직 내려감) · 도리도리는 데이터 부족 · 과적합 → 실기에서 거의 안 흔듦</a:t>
+            </a:r>
+            <a:endParaRPr lang="en-US" sz="1200" dirty="0"/>
           </a:p>
         </p:txBody>
       </p:sp>
@@ -9995,7 +11295,7 @@
                   <a:schemeClr val="tx1"/>
                 </a:solidFill>
               </a:rPr>
-              <a:t>대화: 말로 시키고, 말로 달랜다</a:t>
+              <a:t>행동: ACT 정책을 OpenVINO로</a:t>
             </a:r>
             <a:endParaRPr lang="en-US" sz="3000" dirty="0"/>
           </a:p>
@@ -10033,7 +11333,7 @@
                   <a:schemeClr val="tx2"/>
                 </a:solidFill>
               </a:rPr>
-              <a:t>음성 인식은 노트북 안에서(OpenVINO), 대사 생성 · 음성 합성은 API</a:t>
+              <a:t>physical-ai-studio에서 녹화 · 학습 → OpenVINO로 내보내 노트북 CPU에서 추론</a:t>
             </a:r>
             <a:endParaRPr lang="en-US" sz="1400" dirty="0"/>
           </a:p>
@@ -10041,18 +11341,398 @@
       </p:sp>
       <p:sp>
         <p:nvSpPr>
-          <p:cNvPr id="4" name="box-158"/>
+          <p:cNvPr id="4" name="box-151"/>
           <p:cNvSpPr/>
           <p:nvPr/>
         </p:nvSpPr>
         <p:spPr>
           <a:xfrm>
             <a:off x="457200" y="1280160"/>
-            <a:ext cx="1463040" cy="777240"/>
+            <a:ext cx="1828800" cy="731520"/>
           </a:xfrm>
           <a:prstGeom prst="roundRect">
             <a:avLst>
-              <a:gd name="adj" fmla="val 9412"/>
+              <a:gd name="adj" fmla="val 10000"/>
+            </a:avLst>
+          </a:prstGeom>
+          <a:solidFill>
+            <a:srgbClr val="E3EAFC"/>
+          </a:solidFill>
+          <a:ln w="19050">
+            <a:solidFill>
+              <a:srgbClr val="2F5BD8"/>
+            </a:solidFill>
+            <a:prstDash val="solid"/>
+          </a:ln>
+        </p:spPr>
+      </p:sp>
+      <p:sp>
+        <p:nvSpPr>
+          <p:cNvPr id="5" name="boxtext-152"/>
+          <p:cNvSpPr txBox="1"/>
+          <p:nvPr/>
+        </p:nvSpPr>
+        <p:spPr>
+          <a:xfrm>
+            <a:off x="457200" y="1280160"/>
+            <a:ext cx="1828800" cy="731520"/>
+          </a:xfrm>
+          <a:prstGeom prst="rect">
+            <a:avLst/>
+          </a:prstGeom>
+          <a:noFill/>
+          <a:ln/>
+        </p:spPr>
+        <p:txBody>
+          <a:bodyPr wrap="square" lIns="762" tIns="762" rIns="762" bIns="762" rtlCol="0" anchor="ctr"/>
+          <a:lstStyle/>
+          <a:p>
+            <a:pPr algn="ctr" indent="0" marL="0">
+              <a:buNone/>
+            </a:pPr>
+            <a:r>
+              <a:rPr lang="en-US" sz="1500" b="1" dirty="0">
+                <a:solidFill>
+                  <a:srgbClr val="1D2330"/>
+                </a:solidFill>
+              </a:rPr>
+              <a:t>녹화</a:t>
+            </a:r>
+            <a:endParaRPr lang="en-US" sz="1500" dirty="0"/>
+          </a:p>
+          <a:p>
+            <a:pPr algn="ctr" indent="0" marL="0">
+              <a:buNone/>
+            </a:pPr>
+            <a:r>
+              <a:rPr lang="en-US" sz="1000" dirty="0">
+                <a:solidFill>
+                  <a:srgbClr val="4A5366"/>
+                </a:solidFill>
+              </a:rPr>
+              <a:t>리더 팔 텔레옵 · 31 에피소드</a:t>
+            </a:r>
+            <a:endParaRPr lang="en-US" sz="1500" dirty="0"/>
+          </a:p>
+        </p:txBody>
+      </p:sp>
+      <p:sp>
+        <p:nvSpPr>
+          <p:cNvPr id="6" name="arrow-153"/>
+          <p:cNvSpPr/>
+          <p:nvPr/>
+        </p:nvSpPr>
+        <p:spPr>
+          <a:xfrm>
+            <a:off x="2286000" y="1645920"/>
+            <a:ext cx="301752" cy="914"/>
+          </a:xfrm>
+          <a:prstGeom prst="line">
+            <a:avLst/>
+          </a:prstGeom>
+          <a:noFill/>
+          <a:ln w="19050">
+            <a:solidFill>
+              <a:srgbClr val="7A8394"/>
+            </a:solidFill>
+            <a:prstDash val="solid"/>
+            <a:tailEnd type="triangle"/>
+          </a:ln>
+        </p:spPr>
+      </p:sp>
+      <p:sp>
+        <p:nvSpPr>
+          <p:cNvPr id="7" name="box-154"/>
+          <p:cNvSpPr/>
+          <p:nvPr/>
+        </p:nvSpPr>
+        <p:spPr>
+          <a:xfrm>
+            <a:off x="2587752" y="1280160"/>
+            <a:ext cx="1828800" cy="731520"/>
+          </a:xfrm>
+          <a:prstGeom prst="roundRect">
+            <a:avLst>
+              <a:gd name="adj" fmla="val 10000"/>
+            </a:avLst>
+          </a:prstGeom>
+          <a:solidFill>
+            <a:srgbClr val="E3EAFC"/>
+          </a:solidFill>
+          <a:ln w="19050">
+            <a:solidFill>
+              <a:srgbClr val="2F5BD8"/>
+            </a:solidFill>
+            <a:prstDash val="solid"/>
+          </a:ln>
+        </p:spPr>
+      </p:sp>
+      <p:sp>
+        <p:nvSpPr>
+          <p:cNvPr id="8" name="boxtext-155"/>
+          <p:cNvSpPr txBox="1"/>
+          <p:nvPr/>
+        </p:nvSpPr>
+        <p:spPr>
+          <a:xfrm>
+            <a:off x="2587752" y="1280160"/>
+            <a:ext cx="1828800" cy="731520"/>
+          </a:xfrm>
+          <a:prstGeom prst="rect">
+            <a:avLst/>
+          </a:prstGeom>
+          <a:noFill/>
+          <a:ln/>
+        </p:spPr>
+        <p:txBody>
+          <a:bodyPr wrap="square" lIns="762" tIns="762" rIns="762" bIns="762" rtlCol="0" anchor="ctr"/>
+          <a:lstStyle/>
+          <a:p>
+            <a:pPr algn="ctr" indent="0" marL="0">
+              <a:buNone/>
+            </a:pPr>
+            <a:r>
+              <a:rPr lang="en-US" sz="1500" b="1" dirty="0">
+                <a:solidFill>
+                  <a:srgbClr val="1D2330"/>
+                </a:solidFill>
+              </a:rPr>
+              <a:t>학습</a:t>
+            </a:r>
+            <a:endParaRPr lang="en-US" sz="1500" dirty="0"/>
+          </a:p>
+          <a:p>
+            <a:pPr algn="ctr" indent="0" marL="0">
+              <a:buNone/>
+            </a:pPr>
+            <a:r>
+              <a:rPr lang="en-US" sz="1000" dirty="0">
+                <a:solidFill>
+                  <a:srgbClr val="4A5366"/>
+                </a:solidFill>
+              </a:rPr>
+              <a:t>ACT (ResNet18) · chunk 100</a:t>
+            </a:r>
+            <a:endParaRPr lang="en-US" sz="1500" dirty="0"/>
+          </a:p>
+        </p:txBody>
+      </p:sp>
+      <p:sp>
+        <p:nvSpPr>
+          <p:cNvPr id="9" name="arrow-156"/>
+          <p:cNvSpPr/>
+          <p:nvPr/>
+        </p:nvSpPr>
+        <p:spPr>
+          <a:xfrm>
+            <a:off x="4416552" y="1645920"/>
+            <a:ext cx="301752" cy="914"/>
+          </a:xfrm>
+          <a:prstGeom prst="line">
+            <a:avLst/>
+          </a:prstGeom>
+          <a:noFill/>
+          <a:ln w="19050">
+            <a:solidFill>
+              <a:srgbClr val="7A8394"/>
+            </a:solidFill>
+            <a:prstDash val="solid"/>
+            <a:tailEnd type="triangle"/>
+          </a:ln>
+        </p:spPr>
+      </p:sp>
+      <p:sp>
+        <p:nvSpPr>
+          <p:cNvPr id="10" name="box-157"/>
+          <p:cNvSpPr/>
+          <p:nvPr/>
+        </p:nvSpPr>
+        <p:spPr>
+          <a:xfrm>
+            <a:off x="4718304" y="1280160"/>
+            <a:ext cx="1828800" cy="731520"/>
+          </a:xfrm>
+          <a:prstGeom prst="roundRect">
+            <a:avLst>
+              <a:gd name="adj" fmla="val 10000"/>
+            </a:avLst>
+          </a:prstGeom>
+          <a:solidFill>
+            <a:srgbClr val="EFE5F9"/>
+          </a:solidFill>
+          <a:ln w="19050">
+            <a:solidFill>
+              <a:srgbClr val="7A3FB5"/>
+            </a:solidFill>
+            <a:prstDash val="solid"/>
+          </a:ln>
+        </p:spPr>
+      </p:sp>
+      <p:sp>
+        <p:nvSpPr>
+          <p:cNvPr id="11" name="boxtext-158"/>
+          <p:cNvSpPr txBox="1"/>
+          <p:nvPr/>
+        </p:nvSpPr>
+        <p:spPr>
+          <a:xfrm>
+            <a:off x="4718304" y="1280160"/>
+            <a:ext cx="1828800" cy="731520"/>
+          </a:xfrm>
+          <a:prstGeom prst="rect">
+            <a:avLst/>
+          </a:prstGeom>
+          <a:noFill/>
+          <a:ln/>
+        </p:spPr>
+        <p:txBody>
+          <a:bodyPr wrap="square" lIns="762" tIns="762" rIns="762" bIns="762" rtlCol="0" anchor="ctr"/>
+          <a:lstStyle/>
+          <a:p>
+            <a:pPr algn="ctr" indent="0" marL="0">
+              <a:buNone/>
+            </a:pPr>
+            <a:r>
+              <a:rPr lang="en-US" sz="1500" b="1" dirty="0">
+                <a:solidFill>
+                  <a:srgbClr val="1D2330"/>
+                </a:solidFill>
+              </a:rPr>
+              <a:t>내보내기</a:t>
+            </a:r>
+            <a:endParaRPr lang="en-US" sz="1500" dirty="0"/>
+          </a:p>
+          <a:p>
+            <a:pPr algn="ctr" indent="0" marL="0">
+              <a:buNone/>
+            </a:pPr>
+            <a:r>
+              <a:rPr lang="en-US" sz="1000" dirty="0">
+                <a:solidFill>
+                  <a:srgbClr val="4A5366"/>
+                </a:solidFill>
+              </a:rPr>
+              <a:t>OpenVINO IR (act.xml)</a:t>
+            </a:r>
+            <a:endParaRPr lang="en-US" sz="1500" dirty="0"/>
+          </a:p>
+        </p:txBody>
+      </p:sp>
+      <p:sp>
+        <p:nvSpPr>
+          <p:cNvPr id="12" name="arrow-159"/>
+          <p:cNvSpPr/>
+          <p:nvPr/>
+        </p:nvSpPr>
+        <p:spPr>
+          <a:xfrm>
+            <a:off x="6547104" y="1645920"/>
+            <a:ext cx="301752" cy="914"/>
+          </a:xfrm>
+          <a:prstGeom prst="line">
+            <a:avLst/>
+          </a:prstGeom>
+          <a:noFill/>
+          <a:ln w="19050">
+            <a:solidFill>
+              <a:srgbClr val="7A8394"/>
+            </a:solidFill>
+            <a:prstDash val="solid"/>
+            <a:tailEnd type="triangle"/>
+          </a:ln>
+        </p:spPr>
+      </p:sp>
+      <p:sp>
+        <p:nvSpPr>
+          <p:cNvPr id="13" name="box-160"/>
+          <p:cNvSpPr/>
+          <p:nvPr/>
+        </p:nvSpPr>
+        <p:spPr>
+          <a:xfrm>
+            <a:off x="6848856" y="1280160"/>
+            <a:ext cx="1828800" cy="731520"/>
+          </a:xfrm>
+          <a:prstGeom prst="roundRect">
+            <a:avLst>
+              <a:gd name="adj" fmla="val 10000"/>
+            </a:avLst>
+          </a:prstGeom>
+          <a:solidFill>
+            <a:srgbClr val="FBE9D2"/>
+          </a:solidFill>
+          <a:ln w="19050">
+            <a:solidFill>
+              <a:srgbClr val="C8691A"/>
+            </a:solidFill>
+            <a:prstDash val="solid"/>
+          </a:ln>
+        </p:spPr>
+      </p:sp>
+      <p:sp>
+        <p:nvSpPr>
+          <p:cNvPr id="14" name="boxtext-161"/>
+          <p:cNvSpPr txBox="1"/>
+          <p:nvPr/>
+        </p:nvSpPr>
+        <p:spPr>
+          <a:xfrm>
+            <a:off x="6848856" y="1280160"/>
+            <a:ext cx="1828800" cy="731520"/>
+          </a:xfrm>
+          <a:prstGeom prst="rect">
+            <a:avLst/>
+          </a:prstGeom>
+          <a:noFill/>
+          <a:ln/>
+        </p:spPr>
+        <p:txBody>
+          <a:bodyPr wrap="square" lIns="762" tIns="762" rIns="762" bIns="762" rtlCol="0" anchor="ctr"/>
+          <a:lstStyle/>
+          <a:p>
+            <a:pPr algn="ctr" indent="0" marL="0">
+              <a:buNone/>
+            </a:pPr>
+            <a:r>
+              <a:rPr lang="en-US" sz="1500" b="1" dirty="0">
+                <a:solidFill>
+                  <a:srgbClr val="1D2330"/>
+                </a:solidFill>
+              </a:rPr>
+              <a:t>실행</a:t>
+            </a:r>
+            <a:endParaRPr lang="en-US" sz="1500" dirty="0"/>
+          </a:p>
+          <a:p>
+            <a:pPr algn="ctr" indent="0" marL="0">
+              <a:buNone/>
+            </a:pPr>
+            <a:r>
+              <a:rPr lang="en-US" sz="1000" dirty="0">
+                <a:solidFill>
+                  <a:srgbClr val="4A5366"/>
+                </a:solidFill>
+              </a:rPr>
+              <a:t>physicalai 런타임 · CPU</a:t>
+            </a:r>
+            <a:endParaRPr lang="en-US" sz="1500" dirty="0"/>
+          </a:p>
+        </p:txBody>
+      </p:sp>
+      <p:sp>
+        <p:nvSpPr>
+          <p:cNvPr id="15" name="grip-card"/>
+          <p:cNvSpPr/>
+          <p:nvPr/>
+        </p:nvSpPr>
+        <p:spPr>
+          <a:xfrm>
+            <a:off x="457200" y="2286000"/>
+            <a:ext cx="4114800" cy="2468880"/>
+          </a:xfrm>
+          <a:prstGeom prst="roundRect">
+            <a:avLst>
+              <a:gd name="adj" fmla="val 2963"/>
             </a:avLst>
           </a:prstGeom>
           <a:solidFill>
@@ -10068,8 +11748,754 @@
       </p:sp>
       <p:sp>
         <p:nvSpPr>
-          <p:cNvPr id="5" name="boxtext-159"/>
+          <p:cNvPr id="16" name="Text 14"/>
           <p:cNvSpPr txBox="1"/>
+          <p:nvPr/>
+        </p:nvSpPr>
+        <p:spPr>
+          <a:xfrm>
+            <a:off x="594360" y="2377440"/>
+            <a:ext cx="3840480" cy="320040"/>
+          </a:xfrm>
+          <a:prstGeom prst="rect">
+            <a:avLst/>
+          </a:prstGeom>
+          <a:noFill/>
+          <a:ln/>
+        </p:spPr>
+        <p:txBody>
+          <a:bodyPr wrap="square" lIns="0" tIns="0" rIns="0" bIns="0" rtlCol="0" anchor="ctr"/>
+          <a:lstStyle/>
+          <a:p>
+            <a:pPr indent="0" marL="0">
+              <a:buNone/>
+            </a:pPr>
+            <a:r>
+              <a:rPr lang="en-US" sz="1400" b="1" dirty="0">
+                <a:solidFill>
+                  <a:srgbClr val="1D2330"/>
+                </a:solidFill>
+              </a:rPr>
+              <a:t>놓는 순간을 그리퍼 값으로 감지 (실측)</a:t>
+            </a:r>
+            <a:endParaRPr lang="en-US" sz="1400" dirty="0"/>
+          </a:p>
+        </p:txBody>
+      </p:sp>
+      <p:sp>
+        <p:nvSpPr>
+          <p:cNvPr id="17" name="grip-axis"/>
+          <p:cNvSpPr/>
+          <p:nvPr/>
+        </p:nvSpPr>
+        <p:spPr>
+          <a:xfrm>
+            <a:off x="685800" y="3246120"/>
+            <a:ext cx="3657600" cy="0"/>
+          </a:xfrm>
+          <a:prstGeom prst="line">
+            <a:avLst/>
+          </a:prstGeom>
+          <a:noFill/>
+          <a:ln w="19050">
+            <a:solidFill>
+              <a:srgbClr val="7A8394"/>
+            </a:solidFill>
+            <a:prstDash val="solid"/>
+          </a:ln>
+        </p:spPr>
+      </p:sp>
+      <p:sp>
+        <p:nvSpPr>
+          <p:cNvPr id="18" name="grip-empty"/>
+          <p:cNvSpPr/>
+          <p:nvPr/>
+        </p:nvSpPr>
+        <p:spPr>
+          <a:xfrm>
+            <a:off x="1490472" y="3136392"/>
+            <a:ext cx="128016" cy="219456"/>
+          </a:xfrm>
+          <a:prstGeom prst="rect">
+            <a:avLst/>
+          </a:prstGeom>
+          <a:solidFill>
+            <a:srgbClr val="F3F5F8"/>
+          </a:solidFill>
+          <a:ln w="12700">
+            <a:solidFill>
+              <a:srgbClr val="C9CFD8"/>
+            </a:solidFill>
+            <a:prstDash val="solid"/>
+          </a:ln>
+        </p:spPr>
+      </p:sp>
+      <p:sp>
+        <p:nvSpPr>
+          <p:cNvPr id="19" name="grip-hold"/>
+          <p:cNvSpPr/>
+          <p:nvPr/>
+        </p:nvSpPr>
+        <p:spPr>
+          <a:xfrm>
+            <a:off x="2368296" y="3136392"/>
+            <a:ext cx="219456" cy="219456"/>
+          </a:xfrm>
+          <a:prstGeom prst="rect">
+            <a:avLst/>
+          </a:prstGeom>
+          <a:solidFill>
+            <a:srgbClr val="FBE9D2"/>
+          </a:solidFill>
+          <a:ln w="12700">
+            <a:solidFill>
+              <a:srgbClr val="C8691A"/>
+            </a:solidFill>
+            <a:prstDash val="solid"/>
+          </a:ln>
+        </p:spPr>
+      </p:sp>
+      <p:sp>
+        <p:nvSpPr>
+          <p:cNvPr id="20" name="grip-open"/>
+          <p:cNvSpPr/>
+          <p:nvPr/>
+        </p:nvSpPr>
+        <p:spPr>
+          <a:xfrm>
+            <a:off x="2880360" y="3136392"/>
+            <a:ext cx="1417320" cy="219456"/>
+          </a:xfrm>
+          <a:prstGeom prst="rect">
+            <a:avLst/>
+          </a:prstGeom>
+          <a:solidFill>
+            <a:srgbClr val="DFF3E7"/>
+          </a:solidFill>
+          <a:ln w="12700">
+            <a:solidFill>
+              <a:srgbClr val="1B7F4B"/>
+            </a:solidFill>
+            <a:prstDash val="solid"/>
+          </a:ln>
+        </p:spPr>
+      </p:sp>
+      <p:sp>
+        <p:nvSpPr>
+          <p:cNvPr id="21" name="grip-closed-line"/>
+          <p:cNvSpPr/>
+          <p:nvPr/>
+        </p:nvSpPr>
+        <p:spPr>
+          <a:xfrm>
+            <a:off x="2697480" y="3017520"/>
+            <a:ext cx="0" cy="457200"/>
+          </a:xfrm>
+          <a:prstGeom prst="line">
+            <a:avLst/>
+          </a:prstGeom>
+          <a:noFill/>
+          <a:ln w="25400">
+            <a:solidFill>
+              <a:srgbClr val="2F5BD8"/>
+            </a:solidFill>
+            <a:prstDash val="solid"/>
+          </a:ln>
+        </p:spPr>
+      </p:sp>
+      <p:sp>
+        <p:nvSpPr>
+          <p:cNvPr id="22" name="grip-open-line"/>
+          <p:cNvSpPr/>
+          <p:nvPr/>
+        </p:nvSpPr>
+        <p:spPr>
+          <a:xfrm>
+            <a:off x="2788920" y="3017520"/>
+            <a:ext cx="0" cy="457200"/>
+          </a:xfrm>
+          <a:prstGeom prst="line">
+            <a:avLst/>
+          </a:prstGeom>
+          <a:noFill/>
+          <a:ln w="25400">
+            <a:solidFill>
+              <a:srgbClr val="B3261E"/>
+            </a:solidFill>
+            <a:prstDash val="solid"/>
+          </a:ln>
+        </p:spPr>
+      </p:sp>
+      <p:sp>
+        <p:nvSpPr>
+          <p:cNvPr id="23" name="glab-162"/>
+          <p:cNvSpPr txBox="1"/>
+          <p:nvPr/>
+        </p:nvSpPr>
+        <p:spPr>
+          <a:xfrm>
+            <a:off x="1088136" y="2834640"/>
+            <a:ext cx="914400" cy="228600"/>
+          </a:xfrm>
+          <a:prstGeom prst="rect">
+            <a:avLst/>
+          </a:prstGeom>
+          <a:noFill/>
+          <a:ln/>
+        </p:spPr>
+        <p:txBody>
+          <a:bodyPr wrap="square" lIns="0" tIns="0" rIns="0" bIns="0" rtlCol="0" anchor="ctr"/>
+          <a:lstStyle/>
+          <a:p>
+            <a:pPr algn="ctr" indent="0" marL="0">
+              <a:buNone/>
+            </a:pPr>
+            <a:r>
+              <a:rPr lang="en-US" sz="1000" dirty="0">
+                <a:solidFill>
+                  <a:srgbClr val="4A5366"/>
+                </a:solidFill>
+              </a:rPr>
+              <a:t>빈손 49~50</a:t>
+            </a:r>
+            <a:endParaRPr lang="en-US" sz="1000" dirty="0"/>
+          </a:p>
+        </p:txBody>
+      </p:sp>
+      <p:sp>
+        <p:nvSpPr>
+          <p:cNvPr id="24" name="glab-163"/>
+          <p:cNvSpPr txBox="1"/>
+          <p:nvPr/>
+        </p:nvSpPr>
+        <p:spPr>
+          <a:xfrm>
+            <a:off x="2286000" y="2834640"/>
+            <a:ext cx="822960" cy="228600"/>
+          </a:xfrm>
+          <a:prstGeom prst="rect">
+            <a:avLst/>
+          </a:prstGeom>
+          <a:noFill/>
+          <a:ln/>
+        </p:spPr>
+        <p:txBody>
+          <a:bodyPr wrap="square" lIns="0" tIns="0" rIns="0" bIns="0" rtlCol="0" anchor="ctr"/>
+          <a:lstStyle/>
+          <a:p>
+            <a:pPr algn="ctr" indent="0" marL="0">
+              <a:buNone/>
+            </a:pPr>
+            <a:r>
+              <a:rPr lang="en-US" sz="1000" dirty="0">
+                <a:solidFill>
+                  <a:srgbClr val="4A5366"/>
+                </a:solidFill>
+              </a:rPr>
+              <a:t>닫힘 &lt;56</a:t>
+            </a:r>
+            <a:endParaRPr lang="en-US" sz="1000" dirty="0"/>
+          </a:p>
+        </p:txBody>
+      </p:sp>
+      <p:sp>
+        <p:nvSpPr>
+          <p:cNvPr id="25" name="glab-164"/>
+          <p:cNvSpPr txBox="1"/>
+          <p:nvPr/>
+        </p:nvSpPr>
+        <p:spPr>
+          <a:xfrm>
+            <a:off x="3337560" y="2834640"/>
+            <a:ext cx="914400" cy="228600"/>
+          </a:xfrm>
+          <a:prstGeom prst="rect">
+            <a:avLst/>
+          </a:prstGeom>
+          <a:noFill/>
+          <a:ln/>
+        </p:spPr>
+        <p:txBody>
+          <a:bodyPr wrap="square" lIns="0" tIns="0" rIns="0" bIns="0" rtlCol="0" anchor="ctr"/>
+          <a:lstStyle/>
+          <a:p>
+            <a:pPr algn="ctr" indent="0" marL="0">
+              <a:buNone/>
+            </a:pPr>
+            <a:r>
+              <a:rPr lang="en-US" sz="1000" dirty="0">
+                <a:solidFill>
+                  <a:srgbClr val="4A5366"/>
+                </a:solidFill>
+              </a:rPr>
+              <a:t>벌림 ~79</a:t>
+            </a:r>
+            <a:endParaRPr lang="en-US" sz="1000" dirty="0"/>
+          </a:p>
+        </p:txBody>
+      </p:sp>
+      <p:sp>
+        <p:nvSpPr>
+          <p:cNvPr id="26" name="glab-165"/>
+          <p:cNvSpPr txBox="1"/>
+          <p:nvPr/>
+        </p:nvSpPr>
+        <p:spPr>
+          <a:xfrm>
+            <a:off x="1563624" y="3429000"/>
+            <a:ext cx="868680" cy="228600"/>
+          </a:xfrm>
+          <a:prstGeom prst="rect">
+            <a:avLst/>
+          </a:prstGeom>
+          <a:noFill/>
+          <a:ln/>
+        </p:spPr>
+        <p:txBody>
+          <a:bodyPr wrap="square" lIns="0" tIns="0" rIns="0" bIns="0" rtlCol="0" anchor="ctr"/>
+          <a:lstStyle/>
+          <a:p>
+            <a:pPr algn="r" indent="0" marL="0">
+              <a:buNone/>
+            </a:pPr>
+            <a:r>
+              <a:rPr lang="en-US" sz="1000" dirty="0">
+                <a:solidFill>
+                  <a:srgbClr val="4A5366"/>
+                </a:solidFill>
+              </a:rPr>
+              <a:t>쥠 54~55</a:t>
+            </a:r>
+            <a:endParaRPr lang="en-US" sz="1000" dirty="0"/>
+          </a:p>
+        </p:txBody>
+      </p:sp>
+      <p:sp>
+        <p:nvSpPr>
+          <p:cNvPr id="27" name="glab-166"/>
+          <p:cNvSpPr txBox="1"/>
+          <p:nvPr/>
+        </p:nvSpPr>
+        <p:spPr>
+          <a:xfrm>
+            <a:off x="2834640" y="3429000"/>
+            <a:ext cx="1463040" cy="228600"/>
+          </a:xfrm>
+          <a:prstGeom prst="rect">
+            <a:avLst/>
+          </a:prstGeom>
+          <a:noFill/>
+          <a:ln/>
+        </p:spPr>
+        <p:txBody>
+          <a:bodyPr wrap="square" lIns="0" tIns="0" rIns="0" bIns="0" rtlCol="0" anchor="ctr"/>
+          <a:lstStyle/>
+          <a:p>
+            <a:pPr algn="l" indent="0" marL="0">
+              <a:buNone/>
+            </a:pPr>
+            <a:r>
+              <a:rPr lang="en-US" sz="1000" dirty="0">
+                <a:solidFill>
+                  <a:srgbClr val="4A5366"/>
+                </a:solidFill>
+              </a:rPr>
+              <a:t>열림 &gt;56.5 (0.15초)</a:t>
+            </a:r>
+            <a:endParaRPr lang="en-US" sz="1000" dirty="0"/>
+          </a:p>
+        </p:txBody>
+      </p:sp>
+      <p:sp>
+        <p:nvSpPr>
+          <p:cNvPr id="28" name="Text 26"/>
+          <p:cNvSpPr txBox="1"/>
+          <p:nvPr/>
+        </p:nvSpPr>
+        <p:spPr>
+          <a:xfrm>
+            <a:off x="594360" y="3840480"/>
+            <a:ext cx="3840480" cy="822960"/>
+          </a:xfrm>
+          <a:prstGeom prst="rect">
+            <a:avLst/>
+          </a:prstGeom>
+          <a:noFill/>
+          <a:ln/>
+        </p:spPr>
+        <p:txBody>
+          <a:bodyPr wrap="square" lIns="0" tIns="0" rIns="0" bIns="0" rtlCol="0" anchor="ctr"/>
+          <a:lstStyle/>
+          <a:p>
+            <a:pPr indent="0" marL="0">
+              <a:buNone/>
+            </a:pPr>
+            <a:r>
+              <a:rPr lang="en-US" sz="1100" dirty="0">
+                <a:solidFill>
+                  <a:srgbClr val="4A5366"/>
+                </a:solidFill>
+              </a:rPr>
+              <a:t>닫힘 → 열림이면 ACT 멈춤 → 코드가 lift → home. 녹화 31개 시뮬레이션: 23개가 놓는 순간 정지, 조기 정지 0</a:t>
+            </a:r>
+            <a:endParaRPr lang="en-US" sz="1100" dirty="0"/>
+          </a:p>
+        </p:txBody>
+      </p:sp>
+      <p:sp>
+        <p:nvSpPr>
+          <p:cNvPr id="29" name="card-167"/>
+          <p:cNvSpPr/>
+          <p:nvPr/>
+        </p:nvSpPr>
+        <p:spPr>
+          <a:xfrm>
+            <a:off x="4846320" y="2286000"/>
+            <a:ext cx="3840480" cy="1143000"/>
+          </a:xfrm>
+          <a:prstGeom prst="roundRect">
+            <a:avLst>
+              <a:gd name="adj" fmla="val 6400"/>
+            </a:avLst>
+          </a:prstGeom>
+          <a:solidFill>
+            <a:srgbClr val="F3F5F8"/>
+          </a:solidFill>
+          <a:ln w="12700">
+            <a:solidFill>
+              <a:srgbClr val="C9CFD8"/>
+            </a:solidFill>
+            <a:prstDash val="solid"/>
+          </a:ln>
+        </p:spPr>
+      </p:sp>
+      <p:sp>
+        <p:nvSpPr>
+          <p:cNvPr id="30" name="cardtext-168"/>
+          <p:cNvSpPr txBox="1"/>
+          <p:nvPr/>
+        </p:nvSpPr>
+        <p:spPr>
+          <a:xfrm>
+            <a:off x="4956048" y="2359152"/>
+            <a:ext cx="3621024" cy="996696"/>
+          </a:xfrm>
+          <a:prstGeom prst="rect">
+            <a:avLst/>
+          </a:prstGeom>
+          <a:noFill/>
+          <a:ln/>
+        </p:spPr>
+        <p:txBody>
+          <a:bodyPr wrap="square" lIns="0" tIns="0" rIns="0" bIns="0" rtlCol="0" anchor="t"/>
+          <a:lstStyle/>
+          <a:p>
+            <a:pPr indent="0" marL="0">
+              <a:spcAft>
+                <a:spcPts val="400"/>
+              </a:spcAft>
+              <a:buNone/>
+            </a:pPr>
+            <a:r>
+              <a:rPr lang="en-US" sz="1400" b="1" dirty="0">
+                <a:solidFill>
+                  <a:srgbClr val="1D2330"/>
+                </a:solidFill>
+              </a:rPr>
+              <a:t>정책 입력 · 출력</a:t>
+            </a:r>
+            <a:endParaRPr lang="en-US" sz="1400" dirty="0"/>
+          </a:p>
+          <a:p>
+            <a:pPr marL="342900" indent="-342900">
+              <a:spcAft>
+                <a:spcPts val="300"/>
+              </a:spcAft>
+              <a:buSzPct val="100000"/>
+              <a:buChar char="•"/>
+            </a:pPr>
+            <a:r>
+              <a:rPr lang="en-US" sz="1200" dirty="0">
+                <a:solidFill>
+                  <a:srgbClr val="4A5366"/>
+                </a:solidFill>
+              </a:rPr>
+              <a:t>관절 6개 + 카메라 3대, 384×384 레터박스</a:t>
+            </a:r>
+            <a:endParaRPr lang="en-US" sz="1400" dirty="0"/>
+          </a:p>
+          <a:p>
+            <a:pPr marL="342900" indent="-342900">
+              <a:spcAft>
+                <a:spcPts val="300"/>
+              </a:spcAft>
+              <a:buSzPct val="100000"/>
+              <a:buChar char="•"/>
+            </a:pPr>
+            <a:r>
+              <a:rPr lang="en-US" sz="1200" dirty="0">
+                <a:solidFill>
+                  <a:srgbClr val="4A5366"/>
+                </a:solidFill>
+              </a:rPr>
+              <a:t>출력 100스텝 관절 목표 (약 3.3초 분량)</a:t>
+            </a:r>
+            <a:endParaRPr lang="en-US" sz="1400" dirty="0"/>
+          </a:p>
+        </p:txBody>
+      </p:sp>
+      <p:sp>
+        <p:nvSpPr>
+          <p:cNvPr id="31" name="card-169"/>
+          <p:cNvSpPr/>
+          <p:nvPr/>
+        </p:nvSpPr>
+        <p:spPr>
+          <a:xfrm>
+            <a:off x="4846320" y="3611880"/>
+            <a:ext cx="3840480" cy="1143000"/>
+          </a:xfrm>
+          <a:prstGeom prst="roundRect">
+            <a:avLst>
+              <a:gd name="adj" fmla="val 6400"/>
+            </a:avLst>
+          </a:prstGeom>
+          <a:solidFill>
+            <a:srgbClr val="F3F5F8"/>
+          </a:solidFill>
+          <a:ln w="12700">
+            <a:solidFill>
+              <a:srgbClr val="C9CFD8"/>
+            </a:solidFill>
+            <a:prstDash val="solid"/>
+          </a:ln>
+        </p:spPr>
+      </p:sp>
+      <p:sp>
+        <p:nvSpPr>
+          <p:cNvPr id="32" name="cardtext-170"/>
+          <p:cNvSpPr txBox="1"/>
+          <p:nvPr/>
+        </p:nvSpPr>
+        <p:spPr>
+          <a:xfrm>
+            <a:off x="4956048" y="3685032"/>
+            <a:ext cx="3621024" cy="996696"/>
+          </a:xfrm>
+          <a:prstGeom prst="rect">
+            <a:avLst/>
+          </a:prstGeom>
+          <a:noFill/>
+          <a:ln/>
+        </p:spPr>
+        <p:txBody>
+          <a:bodyPr wrap="square" lIns="0" tIns="0" rIns="0" bIns="0" rtlCol="0" anchor="t"/>
+          <a:lstStyle/>
+          <a:p>
+            <a:pPr indent="0" marL="0">
+              <a:spcAft>
+                <a:spcPts val="400"/>
+              </a:spcAft>
+              <a:buNone/>
+            </a:pPr>
+            <a:r>
+              <a:rPr lang="en-US" sz="1400" b="1" dirty="0">
+                <a:solidFill>
+                  <a:srgbClr val="1D2330"/>
+                </a:solidFill>
+              </a:rPr>
+              <a:t>도리도리</a:t>
+            </a:r>
+            <a:endParaRPr lang="en-US" sz="1400" dirty="0"/>
+          </a:p>
+          <a:p>
+            <a:pPr marL="342900" indent="-342900">
+              <a:spcAft>
+                <a:spcPts val="300"/>
+              </a:spcAft>
+              <a:buSzPct val="100000"/>
+              <a:buChar char="•"/>
+            </a:pPr>
+            <a:r>
+              <a:rPr lang="en-US" sz="1200" dirty="0">
+                <a:solidFill>
+                  <a:srgbClr val="4A5366"/>
+                </a:solidFill>
+              </a:rPr>
+              <a:t>학습 모델은 실기에서 몸통을 ±1만 움직임</a:t>
+            </a:r>
+            <a:endParaRPr lang="en-US" sz="1400" dirty="0"/>
+          </a:p>
+          <a:p>
+            <a:pPr marL="342900" indent="-342900">
+              <a:spcAft>
+                <a:spcPts val="300"/>
+              </a:spcAft>
+              <a:buSzPct val="100000"/>
+              <a:buChar char="•"/>
+            </a:pPr>
+            <a:r>
+              <a:rPr lang="en-US" sz="1200" dirty="0">
+                <a:solidFill>
+                  <a:srgbClr val="4A5366"/>
+                </a:solidFill>
+              </a:rPr>
+              <a:t>거부 · 채팅은 코드 도리도리, 버튼으로 모델도 시험</a:t>
+            </a:r>
+            <a:endParaRPr lang="en-US" sz="1400" dirty="0"/>
+          </a:p>
+        </p:txBody>
+      </p:sp>
+      <p:sp>
+        <p:nvSpPr>
+          <p:cNvPr id="25" name="Slide Number Placeholder 0"/>
+          <p:cNvSpPr>
+            <a:spLocks noGrp="1"/>
+          </p:cNvSpPr>
+          <p:nvPr>
+            <p:ph type="sldNum" sz="quarter" idx="4294967295"/>
+          </p:nvPr>
+        </p:nvSpPr>
+        <p:spPr>
+          <a:xfrm>
+            <a:off x="8321040" y="4800600"/>
+            <a:ext cx="457200" cy="228600"/>
+          </a:xfrm>
+          <a:prstGeom prst="rect">
+            <a:avLst/>
+          </a:prstGeom>
+          <a:extLst>
+            <a:ext uri="{C572A759-6A51-4108-AA02-DFA0A04FC94B}">
+              <ma14:wrappingTextBoxFlag xmlns:ma14="http://schemas.microsoft.com/office/mac/drawingml/2011/main" val="0"/>
+            </a:ext>
+          </a:extLst>
+        </p:spPr>
+        <p:txBody>
+          <a:bodyPr/>
+          <a:lstStyle>
+            <a:lvl1pPr>
+              <a:defRPr sz="1000">
+                <a:solidFill>
+                  <a:srgbClr val="7A8394"/>
+                </a:solidFill>
+              </a:defRPr>
+            </a:lvl1pPr>
+          </a:lstStyle>
+          <a:p>
+            <a:pPr algn="r"/>
+            <a:fld id="{F7021451-1387-4CA6-816F-3879F97B5CBC}" type="slidenum">
+              <a:rPr b="0" lang="en-US"/>
+              <a:t>8</a:t>
+            </a:fld>
+            <a:endParaRPr lang="en-US"/>
+          </a:p>
+        </p:txBody>
+      </p:sp>
+    </p:spTree>
+  </p:cSld>
+  <p:clrMapOvr>
+    <a:masterClrMapping/>
+  </p:clrMapOvr>
+</p:sld>
+</file>
+
+<file path=ppt/slides/slide9.xml><?xml version="1.0" encoding="utf-8"?>
+<p:sld xmlns:a="http://schemas.openxmlformats.org/drawingml/2006/main" xmlns:r="http://schemas.openxmlformats.org/officeDocument/2006/relationships" xmlns:p="http://schemas.openxmlformats.org/presentationml/2006/main">
+  <p:cSld name="Slide 9">
+    <p:spTree>
+      <p:nvGrpSpPr>
+        <p:cNvPr id="1" name=""/>
+        <p:cNvGrpSpPr/>
+        <p:nvPr/>
+      </p:nvGrpSpPr>
+      <p:grpSpPr>
+        <a:xfrm>
+          <a:off x="0" y="0"/>
+          <a:ext cx="0" cy="0"/>
+          <a:chOff x="0" y="0"/>
+          <a:chExt cx="0" cy="0"/>
+        </a:xfrm>
+      </p:grpSpPr>
+      <p:sp>
+        <p:nvSpPr>
+          <p:cNvPr id="2" name="Text 0"/>
+          <p:cNvSpPr/>
+          <p:nvPr>
+            <p:ph idx="100" type="title" hasCustomPrompt="1"/>
+          </p:nvPr>
+        </p:nvSpPr>
+        <p:spPr>
+          <a:xfrm>
+            <a:off x="457200" y="292608"/>
+            <a:ext cx="8229600" cy="548640"/>
+          </a:xfrm>
+          <a:prstGeom prst="rect">
+            <a:avLst/>
+          </a:prstGeom>
+          <a:noFill/>
+          <a:ln/>
+        </p:spPr>
+        <p:txBody>
+          <a:bodyPr wrap="square" lIns="0" tIns="0" rIns="0" bIns="0" rtlCol="0" anchor="ctr"/>
+          <a:lstStyle/>
+          <a:p>
+            <a:pPr indent="0" marL="0">
+              <a:buNone/>
+            </a:pPr>
+            <a:r>
+              <a:rPr lang="en-US" sz="3000" b="1" dirty="0">
+                <a:solidFill>
+                  <a:schemeClr val="tx1"/>
+                </a:solidFill>
+              </a:rPr>
+              <a:t>대화: 말로 시키고, 말로 달랜다</a:t>
+            </a:r>
+            <a:endParaRPr lang="en-US" sz="3000" dirty="0"/>
+          </a:p>
+        </p:txBody>
+      </p:sp>
+      <p:sp>
+        <p:nvSpPr>
+          <p:cNvPr id="3" name="Text 0"/>
+          <p:cNvSpPr/>
+          <p:nvPr>
+            <p:ph idx="101" type="body" hasCustomPrompt="1"/>
+          </p:nvPr>
+        </p:nvSpPr>
+        <p:spPr>
+          <a:xfrm>
+            <a:off x="457200" y="822960"/>
+            <a:ext cx="8229600" cy="365760"/>
+          </a:xfrm>
+          <a:prstGeom prst="rect">
+            <a:avLst/>
+          </a:prstGeom>
+          <a:noFill/>
+          <a:ln/>
+        </p:spPr>
+        <p:txBody>
+          <a:bodyPr wrap="square" lIns="0" tIns="0" rIns="0" bIns="0" rtlCol="0" anchor="t"/>
+          <a:lstStyle/>
+          <a:p>
+            <a:pPr indent="0" marL="0">
+              <a:buNone/>
+            </a:pPr>
+            <a:r>
+              <a:rPr lang="en-US" sz="1400" dirty="0">
+                <a:solidFill>
+                  <a:schemeClr val="tx2"/>
+                </a:solidFill>
+              </a:rPr>
+              <a:t>음성 인식은 노트북 안에서(OpenVINO), 대사 생성 · 음성 합성은 API</a:t>
+            </a:r>
+            <a:endParaRPr lang="en-US" sz="1400" dirty="0"/>
+          </a:p>
+        </p:txBody>
+      </p:sp>
+      <p:sp>
+        <p:nvSpPr>
+          <p:cNvPr id="4" name="box-171"/>
+          <p:cNvSpPr/>
           <p:nvPr/>
         </p:nvSpPr>
         <p:spPr>
@@ -10077,6 +12503,33 @@
             <a:off x="457200" y="1280160"/>
             <a:ext cx="1463040" cy="777240"/>
           </a:xfrm>
+          <a:prstGeom prst="roundRect">
+            <a:avLst>
+              <a:gd name="adj" fmla="val 9412"/>
+            </a:avLst>
+          </a:prstGeom>
+          <a:solidFill>
+            <a:srgbClr val="F3F5F8"/>
+          </a:solidFill>
+          <a:ln w="12700">
+            <a:solidFill>
+              <a:srgbClr val="C9CFD8"/>
+            </a:solidFill>
+            <a:prstDash val="solid"/>
+          </a:ln>
+        </p:spPr>
+      </p:sp>
+      <p:sp>
+        <p:nvSpPr>
+          <p:cNvPr id="5" name="boxtext-172"/>
+          <p:cNvSpPr txBox="1"/>
+          <p:nvPr/>
+        </p:nvSpPr>
+        <p:spPr>
+          <a:xfrm>
+            <a:off x="457200" y="1280160"/>
+            <a:ext cx="1463040" cy="777240"/>
+          </a:xfrm>
           <a:prstGeom prst="rect">
             <a:avLst/>
           </a:prstGeom>
@@ -10118,7 +12571,7 @@
       </p:sp>
       <p:sp>
         <p:nvSpPr>
-          <p:cNvPr id="6" name="arrow-160"/>
+          <p:cNvPr id="6" name="arrow-173"/>
           <p:cNvSpPr/>
           <p:nvPr/>
         </p:nvSpPr>
@@ -10142,7 +12595,7 @@
       </p:sp>
       <p:sp>
         <p:nvSpPr>
-          <p:cNvPr id="7" name="box-161"/>
+          <p:cNvPr id="7" name="box-174"/>
           <p:cNvSpPr/>
           <p:nvPr/>
         </p:nvSpPr>
@@ -10169,7 +12622,7 @@
       </p:sp>
       <p:sp>
         <p:nvSpPr>
-          <p:cNvPr id="8" name="boxtext-162"/>
+          <p:cNvPr id="8" name="boxtext-175"/>
           <p:cNvSpPr txBox="1"/>
           <p:nvPr/>
         </p:nvSpPr>
@@ -10219,7 +12672,7 @@
       </p:sp>
       <p:sp>
         <p:nvSpPr>
-          <p:cNvPr id="9" name="arrow-163"/>
+          <p:cNvPr id="9" name="arrow-176"/>
           <p:cNvSpPr/>
           <p:nvPr/>
         </p:nvSpPr>
@@ -10243,7 +12696,7 @@
       </p:sp>
       <p:sp>
         <p:nvSpPr>
-          <p:cNvPr id="10" name="box-164"/>
+          <p:cNvPr id="10" name="box-177"/>
           <p:cNvSpPr/>
           <p:nvPr/>
         </p:nvSpPr>
@@ -10270,7 +12723,7 @@
       </p:sp>
       <p:sp>
         <p:nvSpPr>
-          <p:cNvPr id="11" name="boxtext-165"/>
+          <p:cNvPr id="11" name="boxtext-178"/>
           <p:cNvSpPr txBox="1"/>
           <p:nvPr/>
         </p:nvSpPr>
@@ -10320,7 +12773,7 @@
       </p:sp>
       <p:sp>
         <p:nvSpPr>
-          <p:cNvPr id="12" name="arrow-166"/>
+          <p:cNvPr id="12" name="arrow-179"/>
           <p:cNvSpPr/>
           <p:nvPr/>
         </p:nvSpPr>
@@ -10344,7 +12797,7 @@
       </p:sp>
       <p:sp>
         <p:nvSpPr>
-          <p:cNvPr id="13" name="box-167"/>
+          <p:cNvPr id="13" name="box-180"/>
           <p:cNvSpPr/>
           <p:nvPr/>
         </p:nvSpPr>
@@ -10371,7 +12824,7 @@
       </p:sp>
       <p:sp>
         <p:nvSpPr>
-          <p:cNvPr id="14" name="boxtext-168"/>
+          <p:cNvPr id="14" name="boxtext-181"/>
           <p:cNvSpPr txBox="1"/>
           <p:nvPr/>
         </p:nvSpPr>
@@ -10421,7 +12874,7 @@
       </p:sp>
       <p:sp>
         <p:nvSpPr>
-          <p:cNvPr id="15" name="arrow-169"/>
+          <p:cNvPr id="15" name="arrow-182"/>
           <p:cNvSpPr/>
           <p:nvPr/>
         </p:nvSpPr>
@@ -10445,7 +12898,7 @@
       </p:sp>
       <p:sp>
         <p:nvSpPr>
-          <p:cNvPr id="16" name="box-170"/>
+          <p:cNvPr id="16" name="box-183"/>
           <p:cNvSpPr/>
           <p:nvPr/>
         </p:nvSpPr>
@@ -10472,7 +12925,7 @@
       </p:sp>
       <p:sp>
         <p:nvSpPr>
-          <p:cNvPr id="17" name="boxtext-171"/>
+          <p:cNvPr id="17" name="boxtext-184"/>
           <p:cNvSpPr txBox="1"/>
           <p:nvPr/>
         </p:nvSpPr>
@@ -10594,7 +13047,7 @@
       </p:sp>
       <p:graphicFrame>
         <p:nvGraphicFramePr>
-          <p:cNvPr id="9" name="intent-table"/>
+          <p:cNvPr id="10" name="intent-table"/>
           <p:cNvGraphicFramePr>
             <a:graphicFrameLocks noGrp="1"/>
           </p:cNvGraphicFramePr>
@@ -11338,7 +13791,7 @@
       </p:graphicFrame>
       <p:sp>
         <p:nvSpPr>
-          <p:cNvPr id="21" name="card-172"/>
+          <p:cNvPr id="21" name="card-185"/>
           <p:cNvSpPr/>
           <p:nvPr/>
         </p:nvSpPr>
@@ -11365,7 +13818,7 @@
       </p:sp>
       <p:sp>
         <p:nvSpPr>
-          <p:cNvPr id="22" name="cardtext-173"/>
+          <p:cNvPr id="22" name="cardtext-186"/>
           <p:cNvSpPr txBox="1"/>
           <p:nvPr/>
         </p:nvSpPr>
@@ -11451,632 +13904,6 @@
                 </a:solidFill>
               </a:rPr>
               <a:t>Gemini 한도가 차면 Windows 한국어 음성(Heami)으로</a:t>
-            </a:r>
-            <a:endParaRPr lang="en-US" sz="1400" dirty="0"/>
-          </a:p>
-        </p:txBody>
-      </p:sp>
-      <p:sp>
-        <p:nvSpPr>
-          <p:cNvPr id="25" name="Slide Number Placeholder 0"/>
-          <p:cNvSpPr>
-            <a:spLocks noGrp="1"/>
-          </p:cNvSpPr>
-          <p:nvPr>
-            <p:ph type="sldNum" sz="quarter" idx="4294967295"/>
-          </p:nvPr>
-        </p:nvSpPr>
-        <p:spPr>
-          <a:xfrm>
-            <a:off x="8321040" y="4800600"/>
-            <a:ext cx="457200" cy="228600"/>
-          </a:xfrm>
-          <a:prstGeom prst="rect">
-            <a:avLst/>
-          </a:prstGeom>
-          <a:extLst>
-            <a:ext uri="{C572A759-6A51-4108-AA02-DFA0A04FC94B}">
-              <ma14:wrappingTextBoxFlag xmlns:ma14="http://schemas.microsoft.com/office/mac/drawingml/2011/main" val="0"/>
-            </a:ext>
-          </a:extLst>
-        </p:spPr>
-        <p:txBody>
-          <a:bodyPr/>
-          <a:lstStyle>
-            <a:lvl1pPr>
-              <a:defRPr sz="1000">
-                <a:solidFill>
-                  <a:srgbClr val="7A8394"/>
-                </a:solidFill>
-              </a:defRPr>
-            </a:lvl1pPr>
-          </a:lstStyle>
-          <a:p>
-            <a:pPr algn="r"/>
-            <a:fld id="{F7021451-1387-4CA6-816F-3879F97B5CBC}" type="slidenum">
-              <a:rPr b="0" lang="en-US"/>
-              <a:t>8</a:t>
-            </a:fld>
-            <a:endParaRPr lang="en-US"/>
-          </a:p>
-        </p:txBody>
-      </p:sp>
-    </p:spTree>
-  </p:cSld>
-  <p:clrMapOvr>
-    <a:masterClrMapping/>
-  </p:clrMapOvr>
-</p:sld>
-</file>
-
-<file path=ppt/slides/slide9.xml><?xml version="1.0" encoding="utf-8"?>
-<p:sld xmlns:a="http://schemas.openxmlformats.org/drawingml/2006/main" xmlns:r="http://schemas.openxmlformats.org/officeDocument/2006/relationships" xmlns:p="http://schemas.openxmlformats.org/presentationml/2006/main">
-  <p:cSld name="Slide 9">
-    <p:spTree>
-      <p:nvGrpSpPr>
-        <p:cNvPr id="1" name=""/>
-        <p:cNvGrpSpPr/>
-        <p:nvPr/>
-      </p:nvGrpSpPr>
-      <p:grpSpPr>
-        <a:xfrm>
-          <a:off x="0" y="0"/>
-          <a:ext cx="0" cy="0"/>
-          <a:chOff x="0" y="0"/>
-          <a:chExt cx="0" cy="0"/>
-        </a:xfrm>
-      </p:grpSpPr>
-      <p:sp>
-        <p:nvSpPr>
-          <p:cNvPr id="2" name="Text 0"/>
-          <p:cNvSpPr/>
-          <p:nvPr>
-            <p:ph idx="100" type="title" hasCustomPrompt="1"/>
-          </p:nvPr>
-        </p:nvSpPr>
-        <p:spPr>
-          <a:xfrm>
-            <a:off x="457200" y="292608"/>
-            <a:ext cx="8229600" cy="548640"/>
-          </a:xfrm>
-          <a:prstGeom prst="rect">
-            <a:avLst/>
-          </a:prstGeom>
-          <a:noFill/>
-          <a:ln/>
-        </p:spPr>
-        <p:txBody>
-          <a:bodyPr wrap="square" lIns="0" tIns="0" rIns="0" bIns="0" rtlCol="0" anchor="ctr"/>
-          <a:lstStyle/>
-          <a:p>
-            <a:pPr indent="0" marL="0">
-              <a:buNone/>
-            </a:pPr>
-            <a:r>
-              <a:rPr lang="en-US" sz="3000" b="1" dirty="0">
-                <a:solidFill>
-                  <a:schemeClr val="tx1"/>
-                </a:solidFill>
-              </a:rPr>
-              <a:t>실기 결과 (2026-10-23)</a:t>
-            </a:r>
-            <a:endParaRPr lang="en-US" sz="3000" dirty="0"/>
-          </a:p>
-        </p:txBody>
-      </p:sp>
-      <p:sp>
-        <p:nvSpPr>
-          <p:cNvPr id="3" name="Text 0"/>
-          <p:cNvSpPr/>
-          <p:nvPr>
-            <p:ph idx="101" type="body" hasCustomPrompt="1"/>
-          </p:nvPr>
-        </p:nvSpPr>
-        <p:spPr>
-          <a:xfrm>
-            <a:off x="457200" y="822960"/>
-            <a:ext cx="8229600" cy="365760"/>
-          </a:xfrm>
-          <a:prstGeom prst="rect">
-            <a:avLst/>
-          </a:prstGeom>
-          <a:noFill/>
-          <a:ln/>
-        </p:spPr>
-        <p:txBody>
-          <a:bodyPr wrap="square" lIns="0" tIns="0" rIns="0" bIns="0" rtlCol="0" anchor="t"/>
-          <a:lstStyle/>
-          <a:p>
-            <a:pPr indent="0" marL="0">
-              <a:buNone/>
-            </a:pPr>
-            <a:r>
-              <a:rPr lang="en-US" sz="1400" dirty="0">
-                <a:solidFill>
-                  <a:schemeClr val="tx2"/>
-                </a:solidFill>
-              </a:rPr>
-              <a:t>노트북에 실제 팔 · 카메라를 연결해 확인한 숫자</a:t>
-            </a:r>
-            <a:endParaRPr lang="en-US" sz="1400" dirty="0"/>
-          </a:p>
-        </p:txBody>
-      </p:sp>
-      <p:sp>
-        <p:nvSpPr>
-          <p:cNvPr id="4" name="stat-174"/>
-          <p:cNvSpPr/>
-          <p:nvPr/>
-        </p:nvSpPr>
-        <p:spPr>
-          <a:xfrm>
-            <a:off x="457200" y="1280160"/>
-            <a:ext cx="1920240" cy="960120"/>
-          </a:xfrm>
-          <a:prstGeom prst="roundRect">
-            <a:avLst>
-              <a:gd name="adj" fmla="val 7619"/>
-            </a:avLst>
-          </a:prstGeom>
-          <a:solidFill>
-            <a:srgbClr val="F3F5F8"/>
-          </a:solidFill>
-          <a:ln w="12700">
-            <a:solidFill>
-              <a:srgbClr val="C9CFD8"/>
-            </a:solidFill>
-            <a:prstDash val="solid"/>
-          </a:ln>
-        </p:spPr>
-      </p:sp>
-      <p:sp>
-        <p:nvSpPr>
-          <p:cNvPr id="5" name="stattext-175"/>
-          <p:cNvSpPr txBox="1"/>
-          <p:nvPr/>
-        </p:nvSpPr>
-        <p:spPr>
-          <a:xfrm>
-            <a:off x="566928" y="1325880"/>
-            <a:ext cx="1737360" cy="868680"/>
-          </a:xfrm>
-          <a:prstGeom prst="rect">
-            <a:avLst/>
-          </a:prstGeom>
-          <a:noFill/>
-          <a:ln/>
-        </p:spPr>
-        <p:txBody>
-          <a:bodyPr wrap="square" lIns="0" tIns="0" rIns="0" bIns="0" rtlCol="0" anchor="ctr"/>
-          <a:lstStyle/>
-          <a:p>
-            <a:pPr indent="0" marL="0">
-              <a:buNone/>
-            </a:pPr>
-            <a:r>
-              <a:rPr lang="en-US" sz="2000" b="1" dirty="0">
-                <a:solidFill>
-                  <a:srgbClr val="1B7F4B"/>
-                </a:solidFill>
-              </a:rPr>
-              <a:t>성공</a:t>
-            </a:r>
-            <a:endParaRPr lang="en-US" sz="2000" dirty="0"/>
-          </a:p>
-          <a:p>
-            <a:pPr indent="0" marL="0">
-              <a:buNone/>
-            </a:pPr>
-            <a:r>
-              <a:rPr lang="en-US" sz="1100" dirty="0">
-                <a:solidFill>
-                  <a:srgbClr val="4A5366"/>
-                </a:solidFill>
-              </a:rPr>
-              <a:t>오란다 1회 · 놓기 감지 · 22.7초</a:t>
-            </a:r>
-            <a:endParaRPr lang="en-US" sz="2000" dirty="0"/>
-          </a:p>
-        </p:txBody>
-      </p:sp>
-      <p:sp>
-        <p:nvSpPr>
-          <p:cNvPr id="6" name="stat-176"/>
-          <p:cNvSpPr/>
-          <p:nvPr/>
-        </p:nvSpPr>
-        <p:spPr>
-          <a:xfrm>
-            <a:off x="2560320" y="1280160"/>
-            <a:ext cx="1920240" cy="960120"/>
-          </a:xfrm>
-          <a:prstGeom prst="roundRect">
-            <a:avLst>
-              <a:gd name="adj" fmla="val 7619"/>
-            </a:avLst>
-          </a:prstGeom>
-          <a:solidFill>
-            <a:srgbClr val="F3F5F8"/>
-          </a:solidFill>
-          <a:ln w="12700">
-            <a:solidFill>
-              <a:srgbClr val="C9CFD8"/>
-            </a:solidFill>
-            <a:prstDash val="solid"/>
-          </a:ln>
-        </p:spPr>
-      </p:sp>
-      <p:sp>
-        <p:nvSpPr>
-          <p:cNvPr id="7" name="stattext-177"/>
-          <p:cNvSpPr txBox="1"/>
-          <p:nvPr/>
-        </p:nvSpPr>
-        <p:spPr>
-          <a:xfrm>
-            <a:off x="2670048" y="1325880"/>
-            <a:ext cx="1737360" cy="868680"/>
-          </a:xfrm>
-          <a:prstGeom prst="rect">
-            <a:avLst/>
-          </a:prstGeom>
-          <a:noFill/>
-          <a:ln/>
-        </p:spPr>
-        <p:txBody>
-          <a:bodyPr wrap="square" lIns="0" tIns="0" rIns="0" bIns="0" rtlCol="0" anchor="ctr"/>
-          <a:lstStyle/>
-          <a:p>
-            <a:pPr indent="0" marL="0">
-              <a:buNone/>
-            </a:pPr>
-            <a:r>
-              <a:rPr lang="en-US" sz="2000" b="1" dirty="0">
-                <a:solidFill>
-                  <a:srgbClr val="1D2330"/>
-                </a:solidFill>
-              </a:rPr>
-              <a:t>3 / 3</a:t>
-            </a:r>
-            <a:endParaRPr lang="en-US" sz="2000" dirty="0"/>
-          </a:p>
-          <a:p>
-            <a:pPr indent="0" marL="0">
-              <a:buNone/>
-            </a:pPr>
-            <a:r>
-              <a:rPr lang="en-US" sz="1100" dirty="0">
-                <a:solidFill>
-                  <a:srgbClr val="4A5366"/>
-                </a:solidFill>
-              </a:rPr>
-              <a:t>OpenCV 개수 · 17ms</a:t>
-            </a:r>
-            <a:endParaRPr lang="en-US" sz="2000" dirty="0"/>
-          </a:p>
-        </p:txBody>
-      </p:sp>
-      <p:sp>
-        <p:nvSpPr>
-          <p:cNvPr id="8" name="stat-178"/>
-          <p:cNvSpPr/>
-          <p:nvPr/>
-        </p:nvSpPr>
-        <p:spPr>
-          <a:xfrm>
-            <a:off x="4663440" y="1280160"/>
-            <a:ext cx="1920240" cy="960120"/>
-          </a:xfrm>
-          <a:prstGeom prst="roundRect">
-            <a:avLst>
-              <a:gd name="adj" fmla="val 7619"/>
-            </a:avLst>
-          </a:prstGeom>
-          <a:solidFill>
-            <a:srgbClr val="F3F5F8"/>
-          </a:solidFill>
-          <a:ln w="12700">
-            <a:solidFill>
-              <a:srgbClr val="C9CFD8"/>
-            </a:solidFill>
-            <a:prstDash val="solid"/>
-          </a:ln>
-        </p:spPr>
-      </p:sp>
-      <p:sp>
-        <p:nvSpPr>
-          <p:cNvPr id="9" name="stattext-179"/>
-          <p:cNvSpPr txBox="1"/>
-          <p:nvPr/>
-        </p:nvSpPr>
-        <p:spPr>
-          <a:xfrm>
-            <a:off x="4773168" y="1325880"/>
-            <a:ext cx="1737360" cy="868680"/>
-          </a:xfrm>
-          <a:prstGeom prst="rect">
-            <a:avLst/>
-          </a:prstGeom>
-          <a:noFill/>
-          <a:ln/>
-        </p:spPr>
-        <p:txBody>
-          <a:bodyPr wrap="square" lIns="0" tIns="0" rIns="0" bIns="0" rtlCol="0" anchor="ctr"/>
-          <a:lstStyle/>
-          <a:p>
-            <a:pPr indent="0" marL="0">
-              <a:buNone/>
-            </a:pPr>
-            <a:r>
-              <a:rPr lang="en-US" sz="2000" b="1" dirty="0">
-                <a:solidFill>
-                  <a:srgbClr val="1D2330"/>
-                </a:solidFill>
-              </a:rPr>
-              <a:t>0.14~0.23초</a:t>
-            </a:r>
-            <a:endParaRPr lang="en-US" sz="2000" dirty="0"/>
-          </a:p>
-          <a:p>
-            <a:pPr indent="0" marL="0">
-              <a:buNone/>
-            </a:pPr>
-            <a:r>
-              <a:rPr lang="en-US" sz="1100" dirty="0">
-                <a:solidFill>
-                  <a:srgbClr val="4A5366"/>
-                </a:solidFill>
-              </a:rPr>
-              <a:t>ACT 추론 1회 (CPU)</a:t>
-            </a:r>
-            <a:endParaRPr lang="en-US" sz="2000" dirty="0"/>
-          </a:p>
-        </p:txBody>
-      </p:sp>
-      <p:sp>
-        <p:nvSpPr>
-          <p:cNvPr id="10" name="stat-180"/>
-          <p:cNvSpPr/>
-          <p:nvPr/>
-        </p:nvSpPr>
-        <p:spPr>
-          <a:xfrm>
-            <a:off x="6766560" y="1280160"/>
-            <a:ext cx="1920240" cy="960120"/>
-          </a:xfrm>
-          <a:prstGeom prst="roundRect">
-            <a:avLst>
-              <a:gd name="adj" fmla="val 7619"/>
-            </a:avLst>
-          </a:prstGeom>
-          <a:solidFill>
-            <a:srgbClr val="F3F5F8"/>
-          </a:solidFill>
-          <a:ln w="12700">
-            <a:solidFill>
-              <a:srgbClr val="C9CFD8"/>
-            </a:solidFill>
-            <a:prstDash val="solid"/>
-          </a:ln>
-        </p:spPr>
-      </p:sp>
-      <p:sp>
-        <p:nvSpPr>
-          <p:cNvPr id="11" name="stattext-181"/>
-          <p:cNvSpPr txBox="1"/>
-          <p:nvPr/>
-        </p:nvSpPr>
-        <p:spPr>
-          <a:xfrm>
-            <a:off x="6876288" y="1325880"/>
-            <a:ext cx="1737360" cy="868680"/>
-          </a:xfrm>
-          <a:prstGeom prst="rect">
-            <a:avLst/>
-          </a:prstGeom>
-          <a:noFill/>
-          <a:ln/>
-        </p:spPr>
-        <p:txBody>
-          <a:bodyPr wrap="square" lIns="0" tIns="0" rIns="0" bIns="0" rtlCol="0" anchor="ctr"/>
-          <a:lstStyle/>
-          <a:p>
-            <a:pPr indent="0" marL="0">
-              <a:buNone/>
-            </a:pPr>
-            <a:r>
-              <a:rPr lang="en-US" sz="2000" b="1" dirty="0">
-                <a:solidFill>
-                  <a:srgbClr val="1D2330"/>
-                </a:solidFill>
-              </a:rPr>
-              <a:t>469+</a:t>
-            </a:r>
-            <a:endParaRPr lang="en-US" sz="2000" dirty="0"/>
-          </a:p>
-          <a:p>
-            <a:pPr indent="0" marL="0">
-              <a:buNone/>
-            </a:pPr>
-            <a:r>
-              <a:rPr lang="en-US" sz="1100" dirty="0">
-                <a:solidFill>
-                  <a:srgbClr val="4A5366"/>
-                </a:solidFill>
-              </a:rPr>
-              <a:t>자동 테스트 통과</a:t>
-            </a:r>
-            <a:endParaRPr lang="en-US" sz="2000" dirty="0"/>
-          </a:p>
-        </p:txBody>
-      </p:sp>
-      <p:graphicFrame>
-        <p:nvGraphicFramePr>
-          <p:cNvPr id="12" name="startup-chart" descr=""/>
-          <p:cNvGraphicFramePr/>
-          <p:nvPr/>
-        </p:nvGraphicFramePr>
-        <p:xfrm>
-          <a:off x="457200" y="2468880"/>
-          <a:ext cx="4206240" cy="2286000"/>
-        </p:xfrm>
-        <a:graphic xmlns:a="http://schemas.openxmlformats.org/drawingml/2006/main">
-          <a:graphicData uri="http://schemas.openxmlformats.org/drawingml/2006/chart">
-            <c:chart xmlns:c="http://schemas.openxmlformats.org/drawingml/2006/chart" r:id="rId1"/>
-          </a:graphicData>
-        </a:graphic>
-      </p:graphicFrame>
-      <p:sp>
-        <p:nvSpPr>
-          <p:cNvPr id="13" name="card-182"/>
-          <p:cNvSpPr/>
-          <p:nvPr/>
-        </p:nvSpPr>
-        <p:spPr>
-          <a:xfrm>
-            <a:off x="4892040" y="2468880"/>
-            <a:ext cx="3794760" cy="2286000"/>
-          </a:xfrm>
-          <a:prstGeom prst="roundRect">
-            <a:avLst>
-              <a:gd name="adj" fmla="val 3200"/>
-            </a:avLst>
-          </a:prstGeom>
-          <a:solidFill>
-            <a:srgbClr val="F3F5F8"/>
-          </a:solidFill>
-          <a:ln w="12700">
-            <a:solidFill>
-              <a:srgbClr val="C9CFD8"/>
-            </a:solidFill>
-            <a:prstDash val="solid"/>
-          </a:ln>
-        </p:spPr>
-      </p:sp>
-      <p:sp>
-        <p:nvSpPr>
-          <p:cNvPr id="14" name="cardtext-183"/>
-          <p:cNvSpPr txBox="1"/>
-          <p:nvPr/>
-        </p:nvSpPr>
-        <p:spPr>
-          <a:xfrm>
-            <a:off x="5001768" y="2542032"/>
-            <a:ext cx="3575304" cy="2139696"/>
-          </a:xfrm>
-          <a:prstGeom prst="rect">
-            <a:avLst/>
-          </a:prstGeom>
-          <a:noFill/>
-          <a:ln/>
-        </p:spPr>
-        <p:txBody>
-          <a:bodyPr wrap="square" lIns="0" tIns="0" rIns="0" bIns="0" rtlCol="0" anchor="t"/>
-          <a:lstStyle/>
-          <a:p>
-            <a:pPr indent="0" marL="0">
-              <a:spcAft>
-                <a:spcPts val="400"/>
-              </a:spcAft>
-              <a:buNone/>
-            </a:pPr>
-            <a:r>
-              <a:rPr lang="en-US" sz="1400" b="1" dirty="0">
-                <a:solidFill>
-                  <a:srgbClr val="1D2330"/>
-                </a:solidFill>
-              </a:rPr>
-              <a:t>현장에서 고친 것</a:t>
-            </a:r>
-            <a:endParaRPr lang="en-US" sz="1400" dirty="0"/>
-          </a:p>
-          <a:p>
-            <a:pPr marL="342900" indent="-342900">
-              <a:spcAft>
-                <a:spcPts val="300"/>
-              </a:spcAft>
-              <a:buSzPct val="100000"/>
-              <a:buChar char="•"/>
-            </a:pPr>
-            <a:r>
-              <a:rPr lang="en-US" sz="1200" dirty="0">
-                <a:solidFill>
-                  <a:srgbClr val="4A5366"/>
-                </a:solidFill>
-              </a:rPr>
-              <a:t>Windows 카메라 목록 오류 → 보정 코드</a:t>
-            </a:r>
-            <a:endParaRPr lang="en-US" sz="1400" dirty="0"/>
-          </a:p>
-          <a:p>
-            <a:pPr marL="342900" indent="-342900">
-              <a:spcAft>
-                <a:spcPts val="300"/>
-              </a:spcAft>
-              <a:buSzPct val="100000"/>
-              <a:buChar char="•"/>
-            </a:pPr>
-            <a:r>
-              <a:rPr lang="en-US" sz="1200" dirty="0">
-                <a:solidFill>
-                  <a:srgbClr val="4A5366"/>
-                </a:solidFill>
-              </a:rPr>
-              <a:t>카메라 3대 동시 열기 실패 → USB 포트 분산</a:t>
-            </a:r>
-            <a:endParaRPr lang="en-US" sz="1400" dirty="0"/>
-          </a:p>
-          <a:p>
-            <a:pPr marL="342900" indent="-342900">
-              <a:spcAft>
-                <a:spcPts val="300"/>
-              </a:spcAft>
-              <a:buSzPct val="100000"/>
-              <a:buChar char="•"/>
-            </a:pPr>
-            <a:r>
-              <a:rPr lang="en-US" sz="1200" dirty="0">
-                <a:solidFill>
-                  <a:srgbClr val="4A5366"/>
-                </a:solidFill>
-              </a:rPr>
-              <a:t>개수 2↔3 흔들림 → 색 마스크 + 5장 중앙값</a:t>
-            </a:r>
-            <a:endParaRPr lang="en-US" sz="1400" dirty="0"/>
-          </a:p>
-          <a:p>
-            <a:pPr marL="342900" indent="-342900">
-              <a:spcAft>
-                <a:spcPts val="300"/>
-              </a:spcAft>
-              <a:buSzPct val="100000"/>
-              <a:buChar char="•"/>
-            </a:pPr>
-            <a:r>
-              <a:rPr lang="en-US" sz="1200" dirty="0">
-                <a:solidFill>
-                  <a:srgbClr val="4A5366"/>
-                </a:solidFill>
-              </a:rPr>
-              <a:t>판정 오류 → 놓은 뒤 다시 세어 확인</a:t>
-            </a:r>
-            <a:endParaRPr lang="en-US" sz="1400" dirty="0"/>
-          </a:p>
-          <a:p>
-            <a:pPr marL="342900" indent="-342900">
-              <a:spcAft>
-                <a:spcPts val="300"/>
-              </a:spcAft>
-              <a:buSzPct val="100000"/>
-              <a:buChar char="•"/>
-            </a:pPr>
-            <a:r>
-              <a:rPr lang="en-US" sz="1200" dirty="0">
-                <a:solidFill>
-                  <a:srgbClr val="4A5366"/>
-                </a:solidFill>
-              </a:rPr>
-              <a:t>도리도리 모델이 안 흔듦 → 코드 도리도리</a:t>
             </a:r>
             <a:endParaRPr lang="en-US" sz="1400" dirty="0"/>
           </a:p>

--- a/docs/slides.pptx
+++ b/docs/slides.pptx
@@ -117,19 +117,19 @@
   <p:extLst>
     <p:ext uri="{521415D9-36F7-43E2-AB2F-B90AF26B5E84}">
       <p14:sectionLst xmlns:p14="http://schemas.microsoft.com/office/powerpoint/2010/main">
-        <p14:section name="소개" id="{fe65b62e-96c9-6465-6fc4-a39da427645a}">
+        <p14:section name="소개" id="{3792989b-264d-fc20-6b10-d79aef9445a7}">
           <p14:sldIdLst>
             <p14:sldId id="256"/>
           </p14:sldIdLst>
         </p14:section>
-        <p14:section name="시스템" id="{9e265fea-739f-a8b2-4254-edd59439d191}">
+        <p14:section name="시스템" id="{ea699123-86a7-fb2d-6b03-6696b018ceae}">
           <p14:sldIdLst>
             <p14:sldId id="257"/>
             <p14:sldId id="258"/>
             <p14:sldId id="259"/>
           </p14:sldIdLst>
         </p14:section>
-        <p14:section name="인식 · 판단 · 행동" id="{6a33c409-0002-ff89-b9c4-03ab3641231c}">
+        <p14:section name="인식 · 판단 · 행동" id="{666223cc-5284-4ba2-1f0e-b16ff1bea6cd}">
           <p14:sldIdLst>
             <p14:sldId id="260"/>
             <p14:sldId id="261"/>
@@ -138,7 +138,7 @@
             <p14:sldId id="264"/>
           </p14:sldIdLst>
         </p14:section>
-        <p14:section name="결과" id="{638f7343-39c2-9240-78a0-b3e4f47631d6}">
+        <p14:section name="결과" id="{77b78e4c-361f-6cdd-d5c1-19b2388d1cb1}">
           <p14:sldIdLst>
             <p14:sldId id="265"/>
             <p14:sldId id="266"/>
@@ -3249,7 +3249,7 @@
                   <a:srgbClr val="1D2330"/>
                 </a:solidFill>
               </a:rPr>
-              <a:t>469+</a:t>
+              <a:t>495</a:t>
             </a:r>
             <a:endParaRPr lang="en-US" sz="2000" dirty="0"/>
           </a:p>

--- a/docs/slides.pptx
+++ b/docs/slides.pptx
@@ -117,19 +117,19 @@
   <p:extLst>
     <p:ext uri="{521415D9-36F7-43E2-AB2F-B90AF26B5E84}">
       <p14:sectionLst xmlns:p14="http://schemas.microsoft.com/office/powerpoint/2010/main">
-        <p14:section name="소개" id="{3792989b-264d-fc20-6b10-d79aef9445a7}">
+        <p14:section name="소개" id="{6b92612c-182f-26d0-3ee4-aa1c15ba2f1d}">
           <p14:sldIdLst>
             <p14:sldId id="256"/>
           </p14:sldIdLst>
         </p14:section>
-        <p14:section name="시스템" id="{ea699123-86a7-fb2d-6b03-6696b018ceae}">
+        <p14:section name="시스템" id="{30453b15-d463-8c6c-7525-2bc5602ff439}">
           <p14:sldIdLst>
             <p14:sldId id="257"/>
             <p14:sldId id="258"/>
             <p14:sldId id="259"/>
           </p14:sldIdLst>
         </p14:section>
-        <p14:section name="인식 · 판단 · 행동" id="{666223cc-5284-4ba2-1f0e-b16ff1bea6cd}">
+        <p14:section name="인식 · 판단 · 행동" id="{87446d46-3443-2940-b8d5-9559322cb576}">
           <p14:sldIdLst>
             <p14:sldId id="260"/>
             <p14:sldId id="261"/>
@@ -138,7 +138,7 @@
             <p14:sldId id="264"/>
           </p14:sldIdLst>
         </p14:section>
-        <p14:section name="결과" id="{77b78e4c-361f-6cdd-d5c1-19b2388d1cb1}">
+        <p14:section name="결과" id="{5f91c33f-246d-a4f0-4604-c62997268c58}">
           <p14:sldIdLst>
             <p14:sldId id="265"/>
             <p14:sldId id="266"/>
@@ -3249,7 +3249,7 @@
                   <a:srgbClr val="1D2330"/>
                 </a:solidFill>
               </a:rPr>
-              <a:t>495</a:t>
+              <a:t>499</a:t>
             </a:r>
             <a:endParaRPr lang="en-US" sz="2000" dirty="0"/>
           </a:p>
@@ -3418,6 +3418,24 @@
                 </a:solidFill>
               </a:rPr>
               <a:t>판정 오류 → 놓은 뒤 다시 세어 확인</a:t>
+            </a:r>
+            <a:endParaRPr lang="en-US" sz="1400" dirty="0"/>
+          </a:p>
+          <a:p>
+            <a:pPr marL="342900" indent="-342900">
+              <a:spcAft>
+                <a:spcPts val="300"/>
+              </a:spcAft>
+              <a:buSzPct val="100000"/>
+              <a:buChar char="•"/>
+            </a:pPr>
+            <a:r>
+              <a:rPr lang="en-US" sz="1200" dirty="0">
+                <a:solidFill>
+                  <a:srgbClr val="4A5366"/>
+                </a:solidFill>
+              </a:rPr>
+              <a:t>두 번 놓치면 → 투덜 + 도리도리, “이어서 해줘”</a:t>
             </a:r>
             <a:endParaRPr lang="en-US" sz="1400" dirty="0"/>
           </a:p>
@@ -13068,8 +13086,8 @@
             <a:tbl>
               <a:tblPr/>
               <a:tblGrid>
-                <a:gridCol w="731520"/>
-                <a:gridCol w="2057400"/>
+                <a:gridCol w="960120"/>
+                <a:gridCol w="1828800"/>
                 <a:gridCol w="1417320"/>
               </a:tblGrid>
               <a:tr h="384048">
@@ -13624,6 +13642,182 @@
                             <a:srgbClr val="4A5366"/>
                           </a:solidFill>
                         </a:rPr>
+                        <a:t>두 번 놓친 뒤</a:t>
+                      </a:r>
+                      <a:endParaRPr lang="en-US" sz="1100" dirty="0"/>
+                    </a:p>
+                  </a:txBody>
+                  <a:tcPr marL="91440" marR="91440" marT="45720" marB="45720" anchor="ctr">
+                    <a:lnL w="9525" cap="flat" cmpd="sng" algn="ctr">
+                      <a:solidFill>
+                        <a:srgbClr val="C9CFD8"/>
+                      </a:solidFill>
+                      <a:prstDash val="solid"/>
+                      <a:round/>
+                      <a:headEnd type="none" w="med" len="med"/>
+                      <a:tailEnd type="none" w="med" len="med"/>
+                    </a:lnL>
+                    <a:lnR w="9525" cap="flat" cmpd="sng" algn="ctr">
+                      <a:solidFill>
+                        <a:srgbClr val="C9CFD8"/>
+                      </a:solidFill>
+                      <a:prstDash val="solid"/>
+                      <a:round/>
+                      <a:headEnd type="none" w="med" len="med"/>
+                      <a:tailEnd type="none" w="med" len="med"/>
+                    </a:lnR>
+                    <a:lnT w="9525" cap="flat" cmpd="sng" algn="ctr">
+                      <a:solidFill>
+                        <a:srgbClr val="C9CFD8"/>
+                      </a:solidFill>
+                      <a:prstDash val="solid"/>
+                      <a:round/>
+                      <a:headEnd type="none" w="med" len="med"/>
+                      <a:tailEnd type="none" w="med" len="med"/>
+                    </a:lnT>
+                    <a:lnB w="9525" cap="flat" cmpd="sng" algn="ctr">
+                      <a:solidFill>
+                        <a:srgbClr val="C9CFD8"/>
+                      </a:solidFill>
+                      <a:prstDash val="solid"/>
+                      <a:round/>
+                      <a:headEnd type="none" w="med" len="med"/>
+                      <a:tailEnd type="none" w="med" len="med"/>
+                    </a:lnB>
+                  </a:tcPr>
+                </a:tc>
+                <a:tc>
+                  <a:txBody>
+                    <a:bodyPr/>
+                    <a:lstStyle/>
+                    <a:p>
+                      <a:pPr indent="0" marL="0">
+                        <a:buNone/>
+                      </a:pPr>
+                      <a:r>
+                        <a:rPr lang="en-US" sz="1100" dirty="0">
+                          <a:solidFill>
+                            <a:srgbClr val="4A5366"/>
+                          </a:solidFill>
+                        </a:rPr>
+                        <a:t>재개 · 잡담</a:t>
+                      </a:r>
+                      <a:endParaRPr lang="en-US" sz="1100" dirty="0"/>
+                    </a:p>
+                  </a:txBody>
+                  <a:tcPr marL="91440" marR="91440" marT="45720" marB="45720" anchor="ctr">
+                    <a:lnL w="9525" cap="flat" cmpd="sng" algn="ctr">
+                      <a:solidFill>
+                        <a:srgbClr val="C9CFD8"/>
+                      </a:solidFill>
+                      <a:prstDash val="solid"/>
+                      <a:round/>
+                      <a:headEnd type="none" w="med" len="med"/>
+                      <a:tailEnd type="none" w="med" len="med"/>
+                    </a:lnL>
+                    <a:lnR w="9525" cap="flat" cmpd="sng" algn="ctr">
+                      <a:solidFill>
+                        <a:srgbClr val="C9CFD8"/>
+                      </a:solidFill>
+                      <a:prstDash val="solid"/>
+                      <a:round/>
+                      <a:headEnd type="none" w="med" len="med"/>
+                      <a:tailEnd type="none" w="med" len="med"/>
+                    </a:lnR>
+                    <a:lnT w="9525" cap="flat" cmpd="sng" algn="ctr">
+                      <a:solidFill>
+                        <a:srgbClr val="C9CFD8"/>
+                      </a:solidFill>
+                      <a:prstDash val="solid"/>
+                      <a:round/>
+                      <a:headEnd type="none" w="med" len="med"/>
+                      <a:tailEnd type="none" w="med" len="med"/>
+                    </a:lnT>
+                    <a:lnB w="9525" cap="flat" cmpd="sng" algn="ctr">
+                      <a:solidFill>
+                        <a:srgbClr val="C9CFD8"/>
+                      </a:solidFill>
+                      <a:prstDash val="solid"/>
+                      <a:round/>
+                      <a:headEnd type="none" w="med" len="med"/>
+                      <a:tailEnd type="none" w="med" len="med"/>
+                    </a:lnB>
+                  </a:tcPr>
+                </a:tc>
+                <a:tc>
+                  <a:txBody>
+                    <a:bodyPr/>
+                    <a:lstStyle/>
+                    <a:p>
+                      <a:pPr indent="0" marL="0">
+                        <a:buNone/>
+                      </a:pPr>
+                      <a:r>
+                        <a:rPr lang="en-US" sz="1100" dirty="0">
+                          <a:solidFill>
+                            <a:srgbClr val="4A5366"/>
+                          </a:solidFill>
+                        </a:rPr>
+                        <a:t>“이어서 해줘”</a:t>
+                      </a:r>
+                      <a:endParaRPr lang="en-US" sz="1100" dirty="0"/>
+                    </a:p>
+                  </a:txBody>
+                  <a:tcPr marL="91440" marR="91440" marT="45720" marB="45720" anchor="ctr">
+                    <a:lnL w="9525" cap="flat" cmpd="sng" algn="ctr">
+                      <a:solidFill>
+                        <a:srgbClr val="C9CFD8"/>
+                      </a:solidFill>
+                      <a:prstDash val="solid"/>
+                      <a:round/>
+                      <a:headEnd type="none" w="med" len="med"/>
+                      <a:tailEnd type="none" w="med" len="med"/>
+                    </a:lnL>
+                    <a:lnR w="9525" cap="flat" cmpd="sng" algn="ctr">
+                      <a:solidFill>
+                        <a:srgbClr val="C9CFD8"/>
+                      </a:solidFill>
+                      <a:prstDash val="solid"/>
+                      <a:round/>
+                      <a:headEnd type="none" w="med" len="med"/>
+                      <a:tailEnd type="none" w="med" len="med"/>
+                    </a:lnR>
+                    <a:lnT w="9525" cap="flat" cmpd="sng" algn="ctr">
+                      <a:solidFill>
+                        <a:srgbClr val="C9CFD8"/>
+                      </a:solidFill>
+                      <a:prstDash val="solid"/>
+                      <a:round/>
+                      <a:headEnd type="none" w="med" len="med"/>
+                      <a:tailEnd type="none" w="med" len="med"/>
+                    </a:lnT>
+                    <a:lnB w="9525" cap="flat" cmpd="sng" algn="ctr">
+                      <a:solidFill>
+                        <a:srgbClr val="C9CFD8"/>
+                      </a:solidFill>
+                      <a:prstDash val="solid"/>
+                      <a:round/>
+                      <a:headEnd type="none" w="med" len="med"/>
+                      <a:tailEnd type="none" w="med" len="med"/>
+                    </a:lnB>
+                  </a:tcPr>
+                </a:tc>
+              </a:tr>
+              <a:tr h="384048">
+                <a:tc>
+                  <a:txBody>
+                    <a:bodyPr/>
+                    <a:lstStyle/>
+                    <a:p>
+                      <a:pPr indent="0" marL="0">
+                        <a:buNone/>
+                      </a:pPr>
+                      <a:r>
+                        <a:rPr lang="en-US" sz="1100" dirty="0">
+                          <a:solidFill>
+                            <a:srgbClr val="4A5366"/>
+                          </a:solidFill>
+                        </a:rPr>
                         <a:t>작업 중</a:t>
                       </a:r>
                       <a:endParaRPr lang="en-US" sz="1100" dirty="0"/>

--- a/docs/slides.pptx
+++ b/docs/slides.pptx
@@ -117,19 +117,19 @@
   <p:extLst>
     <p:ext uri="{521415D9-36F7-43E2-AB2F-B90AF26B5E84}">
       <p14:sectionLst xmlns:p14="http://schemas.microsoft.com/office/powerpoint/2010/main">
-        <p14:section name="소개" id="{6b92612c-182f-26d0-3ee4-aa1c15ba2f1d}">
+        <p14:section name="소개" id="{2c66d8f1-108c-000c-e65a-d8c587ec1a57}">
           <p14:sldIdLst>
             <p14:sldId id="256"/>
           </p14:sldIdLst>
         </p14:section>
-        <p14:section name="시스템" id="{30453b15-d463-8c6c-7525-2bc5602ff439}">
+        <p14:section name="시스템" id="{619b64bb-66aa-59e7-c15f-f7e34b6586d4}">
           <p14:sldIdLst>
             <p14:sldId id="257"/>
             <p14:sldId id="258"/>
             <p14:sldId id="259"/>
           </p14:sldIdLst>
         </p14:section>
-        <p14:section name="인식 · 판단 · 행동" id="{87446d46-3443-2940-b8d5-9559322cb576}">
+        <p14:section name="인식 · 판단 · 행동" id="{3b71ea7c-bbe3-08b2-c62a-7dd3c7daba3d}">
           <p14:sldIdLst>
             <p14:sldId id="260"/>
             <p14:sldId id="261"/>
@@ -138,7 +138,7 @@
             <p14:sldId id="264"/>
           </p14:sldIdLst>
         </p14:section>
-        <p14:section name="결과" id="{5f91c33f-246d-a4f0-4604-c62997268c58}">
+        <p14:section name="결과" id="{f2a5ad63-a1c3-a7d4-2e18-f3c0cd025038}">
           <p14:sldIdLst>
             <p14:sldId id="265"/>
             <p14:sldId id="266"/>
@@ -2355,7 +2355,7 @@
                   <a:srgbClr val="F0A050"/>
                 </a:solidFill>
               </a:rPr>
-              <a:t>INTEL OPENVINO 과정 · 2일 해커톤</a:t>
+              <a:t>INTEL OPENVINO 과정 · 로봇팔 프로젝트</a:t>
             </a:r>
             <a:endParaRPr lang="en-US" sz="1300" dirty="0"/>
           </a:p>
